--- a/videos/machine-learning/03_ridger_regression_gradient_descent/recreated_pptx/slide_019_recreated.pptx
+++ b/videos/machine-learning/03_ridger_regression_gradient_descent/recreated_pptx/slide_019_recreated.pptx
@@ -2577,7 +2577,7 @@
           <a:noFill/>
           <a:ln w="12700">
             <a:solidFill>
-              <a:srgbClr val="8B3A3A"/>
+              <a:srgbClr val="8A2024"/>
             </a:solidFill>
             <a:prstDash val="solid"/>
           </a:ln>
@@ -2591,8 +2591,31 @@
         </p:nvSpPr>
         <p:spPr>
           <a:xfrm>
+            <a:off x="8178800" y="2159000"/>
+            <a:ext cx="3175000" cy="0"/>
+          </a:xfrm>
+          <a:prstGeom prst="line">
+            <a:avLst/>
+          </a:prstGeom>
+          <a:noFill/>
+          <a:ln w="12700">
+            <a:solidFill>
+              <a:srgbClr val="008000"/>
+            </a:solidFill>
+            <a:prstDash val="solid"/>
+          </a:ln>
+        </p:spPr>
+      </p:sp>
+      <p:sp>
+        <p:nvSpPr>
+          <p:cNvPr id="62" name="Shape 60"/>
+          <p:cNvSpPr/>
+          <p:nvPr/>
+        </p:nvSpPr>
+        <p:spPr>
+          <a:xfrm>
             <a:off x="812800" y="6654800"/>
-            <a:ext cx="7327900" cy="0"/>
+            <a:ext cx="4013200" cy="0"/>
           </a:xfrm>
           <a:prstGeom prst="line">
             <a:avLst/>
@@ -2608,14 +2631,37 @@
       </p:sp>
       <p:sp>
         <p:nvSpPr>
-          <p:cNvPr id="62" name="Shape 60"/>
-          <p:cNvSpPr/>
-          <p:nvPr/>
-        </p:nvSpPr>
-        <p:spPr>
-          <a:xfrm>
-            <a:off x="8140700" y="6654800"/>
-            <a:ext cx="3213100" cy="0"/>
+          <p:cNvPr id="63" name="Shape 61"/>
+          <p:cNvSpPr/>
+          <p:nvPr/>
+        </p:nvSpPr>
+        <p:spPr>
+          <a:xfrm>
+            <a:off x="4864100" y="6654800"/>
+            <a:ext cx="3263900" cy="0"/>
+          </a:xfrm>
+          <a:prstGeom prst="line">
+            <a:avLst/>
+          </a:prstGeom>
+          <a:noFill/>
+          <a:ln w="12700">
+            <a:solidFill>
+              <a:srgbClr val="8A2024"/>
+            </a:solidFill>
+            <a:prstDash val="solid"/>
+          </a:ln>
+        </p:spPr>
+      </p:sp>
+      <p:sp>
+        <p:nvSpPr>
+          <p:cNvPr id="64" name="Shape 62"/>
+          <p:cNvSpPr/>
+          <p:nvPr/>
+        </p:nvSpPr>
+        <p:spPr>
+          <a:xfrm>
+            <a:off x="8178800" y="6654800"/>
+            <a:ext cx="3175000" cy="0"/>
           </a:xfrm>
           <a:prstGeom prst="line">
             <a:avLst/>
@@ -2631,7 +2677,7 @@
       </p:sp>
       <p:sp>
         <p:nvSpPr>
-          <p:cNvPr id="63" name="Shape 61"/>
+          <p:cNvPr id="65" name="Shape 63"/>
           <p:cNvSpPr/>
           <p:nvPr/>
         </p:nvSpPr>
@@ -2654,7 +2700,7 @@
       </p:sp>
       <p:sp>
         <p:nvSpPr>
-          <p:cNvPr id="64" name="Shape 62"/>
+          <p:cNvPr id="66" name="Shape 64"/>
           <p:cNvSpPr/>
           <p:nvPr/>
         </p:nvSpPr>
@@ -2677,14 +2723,37 @@
       </p:sp>
       <p:sp>
         <p:nvSpPr>
-          <p:cNvPr id="65" name="Shape 63"/>
-          <p:cNvSpPr/>
-          <p:nvPr/>
-        </p:nvSpPr>
-        <p:spPr>
-          <a:xfrm>
-            <a:off x="1651000" y="2133600"/>
+          <p:cNvPr id="67" name="Shape 65"/>
+          <p:cNvSpPr/>
+          <p:nvPr/>
+        </p:nvSpPr>
+        <p:spPr>
+          <a:xfrm>
+            <a:off x="4800600" y="2133600"/>
             <a:ext cx="0" cy="4546600"/>
+          </a:xfrm>
+          <a:prstGeom prst="line">
+            <a:avLst/>
+          </a:prstGeom>
+          <a:noFill/>
+          <a:ln w="12700">
+            <a:solidFill>
+              <a:srgbClr val="201860"/>
+            </a:solidFill>
+            <a:prstDash val="solid"/>
+          </a:ln>
+        </p:spPr>
+      </p:sp>
+      <p:sp>
+        <p:nvSpPr>
+          <p:cNvPr id="68" name="Shape 66"/>
+          <p:cNvSpPr/>
+          <p:nvPr/>
+        </p:nvSpPr>
+        <p:spPr>
+          <a:xfrm>
+            <a:off x="2609850" y="2578100"/>
+            <a:ext cx="0" cy="1117600"/>
           </a:xfrm>
           <a:prstGeom prst="line">
             <a:avLst/>
@@ -2700,36 +2769,13 @@
       </p:sp>
       <p:sp>
         <p:nvSpPr>
-          <p:cNvPr id="66" name="Shape 64"/>
-          <p:cNvSpPr/>
-          <p:nvPr/>
-        </p:nvSpPr>
-        <p:spPr>
-          <a:xfrm>
-            <a:off x="4800600" y="2133600"/>
-            <a:ext cx="0" cy="4546600"/>
-          </a:xfrm>
-          <a:prstGeom prst="line">
-            <a:avLst/>
-          </a:prstGeom>
-          <a:noFill/>
-          <a:ln w="12700">
-            <a:solidFill>
-              <a:srgbClr val="201860"/>
-            </a:solidFill>
-            <a:prstDash val="solid"/>
-          </a:ln>
-        </p:spPr>
-      </p:sp>
-      <p:sp>
-        <p:nvSpPr>
-          <p:cNvPr id="67" name="Shape 65"/>
-          <p:cNvSpPr/>
-          <p:nvPr/>
-        </p:nvSpPr>
-        <p:spPr>
-          <a:xfrm>
-            <a:off x="2609850" y="2578100"/>
+          <p:cNvPr id="69" name="Shape 67"/>
+          <p:cNvSpPr/>
+          <p:nvPr/>
+        </p:nvSpPr>
+        <p:spPr>
+          <a:xfrm>
+            <a:off x="5918200" y="2578100"/>
             <a:ext cx="0" cy="1117600"/>
           </a:xfrm>
           <a:prstGeom prst="line">
@@ -2746,13 +2792,13 @@
       </p:sp>
       <p:sp>
         <p:nvSpPr>
-          <p:cNvPr id="68" name="Shape 66"/>
-          <p:cNvSpPr/>
-          <p:nvPr/>
-        </p:nvSpPr>
-        <p:spPr>
-          <a:xfrm>
-            <a:off x="5918200" y="2578100"/>
+          <p:cNvPr id="70" name="Shape 68"/>
+          <p:cNvSpPr/>
+          <p:nvPr/>
+        </p:nvSpPr>
+        <p:spPr>
+          <a:xfrm>
+            <a:off x="9194800" y="2578100"/>
             <a:ext cx="0" cy="1117600"/>
           </a:xfrm>
           <a:prstGeom prst="line">
@@ -2769,14 +2815,14 @@
       </p:sp>
       <p:sp>
         <p:nvSpPr>
-          <p:cNvPr id="69" name="Shape 67"/>
-          <p:cNvSpPr/>
-          <p:nvPr/>
-        </p:nvSpPr>
-        <p:spPr>
-          <a:xfrm>
-            <a:off x="9194800" y="2578100"/>
-            <a:ext cx="0" cy="1117600"/>
+          <p:cNvPr id="71" name="Shape 69"/>
+          <p:cNvSpPr/>
+          <p:nvPr/>
+        </p:nvSpPr>
+        <p:spPr>
+          <a:xfrm>
+            <a:off x="2609850" y="3937000"/>
+            <a:ext cx="0" cy="876300"/>
           </a:xfrm>
           <a:prstGeom prst="line">
             <a:avLst/>
@@ -2792,13 +2838,13 @@
       </p:sp>
       <p:sp>
         <p:nvSpPr>
-          <p:cNvPr id="70" name="Shape 68"/>
-          <p:cNvSpPr/>
-          <p:nvPr/>
-        </p:nvSpPr>
-        <p:spPr>
-          <a:xfrm>
-            <a:off x="2609850" y="3937000"/>
+          <p:cNvPr id="72" name="Shape 70"/>
+          <p:cNvSpPr/>
+          <p:nvPr/>
+        </p:nvSpPr>
+        <p:spPr>
+          <a:xfrm>
+            <a:off x="5918200" y="3937000"/>
             <a:ext cx="0" cy="876300"/>
           </a:xfrm>
           <a:prstGeom prst="line">
@@ -2815,13 +2861,13 @@
       </p:sp>
       <p:sp>
         <p:nvSpPr>
-          <p:cNvPr id="71" name="Shape 69"/>
-          <p:cNvSpPr/>
-          <p:nvPr/>
-        </p:nvSpPr>
-        <p:spPr>
-          <a:xfrm>
-            <a:off x="5918200" y="3937000"/>
+          <p:cNvPr id="73" name="Shape 71"/>
+          <p:cNvSpPr/>
+          <p:nvPr/>
+        </p:nvSpPr>
+        <p:spPr>
+          <a:xfrm>
+            <a:off x="9194800" y="3937000"/>
             <a:ext cx="0" cy="876300"/>
           </a:xfrm>
           <a:prstGeom prst="line">
@@ -2838,14 +2884,14 @@
       </p:sp>
       <p:sp>
         <p:nvSpPr>
-          <p:cNvPr id="72" name="Shape 70"/>
-          <p:cNvSpPr/>
-          <p:nvPr/>
-        </p:nvSpPr>
-        <p:spPr>
-          <a:xfrm>
-            <a:off x="9194800" y="3937000"/>
-            <a:ext cx="0" cy="876300"/>
+          <p:cNvPr id="74" name="Shape 72"/>
+          <p:cNvSpPr/>
+          <p:nvPr/>
+        </p:nvSpPr>
+        <p:spPr>
+          <a:xfrm>
+            <a:off x="2609850" y="5283200"/>
+            <a:ext cx="0" cy="1231900"/>
           </a:xfrm>
           <a:prstGeom prst="line">
             <a:avLst/>
@@ -2861,13 +2907,13 @@
       </p:sp>
       <p:sp>
         <p:nvSpPr>
-          <p:cNvPr id="73" name="Shape 71"/>
-          <p:cNvSpPr/>
-          <p:nvPr/>
-        </p:nvSpPr>
-        <p:spPr>
-          <a:xfrm>
-            <a:off x="2609850" y="5283200"/>
+          <p:cNvPr id="75" name="Shape 73"/>
+          <p:cNvSpPr/>
+          <p:nvPr/>
+        </p:nvSpPr>
+        <p:spPr>
+          <a:xfrm>
+            <a:off x="5918200" y="5283200"/>
             <a:ext cx="0" cy="1231900"/>
           </a:xfrm>
           <a:prstGeom prst="line">
@@ -2884,13 +2930,13 @@
       </p:sp>
       <p:sp>
         <p:nvSpPr>
-          <p:cNvPr id="74" name="Shape 72"/>
-          <p:cNvSpPr/>
-          <p:nvPr/>
-        </p:nvSpPr>
-        <p:spPr>
-          <a:xfrm>
-            <a:off x="5918200" y="5283200"/>
+          <p:cNvPr id="76" name="Shape 74"/>
+          <p:cNvSpPr/>
+          <p:nvPr/>
+        </p:nvSpPr>
+        <p:spPr>
+          <a:xfrm>
+            <a:off x="9194800" y="5283200"/>
             <a:ext cx="0" cy="1231900"/>
           </a:xfrm>
           <a:prstGeom prst="line">
@@ -2907,14 +2953,14 @@
       </p:sp>
       <p:sp>
         <p:nvSpPr>
-          <p:cNvPr id="75" name="Shape 73"/>
-          <p:cNvSpPr/>
-          <p:nvPr/>
-        </p:nvSpPr>
-        <p:spPr>
-          <a:xfrm>
-            <a:off x="9194800" y="5283200"/>
-            <a:ext cx="0" cy="1231900"/>
+          <p:cNvPr id="77" name="Shape 75"/>
+          <p:cNvSpPr/>
+          <p:nvPr/>
+        </p:nvSpPr>
+        <p:spPr>
+          <a:xfrm>
+            <a:off x="4870450" y="2146300"/>
+            <a:ext cx="0" cy="4521200"/>
           </a:xfrm>
           <a:prstGeom prst="line">
             <a:avLst/>
@@ -2922,7 +2968,7 @@
           <a:noFill/>
           <a:ln w="12700">
             <a:solidFill>
-              <a:srgbClr val="8B3A3A"/>
+              <a:srgbClr val="8A2024"/>
             </a:solidFill>
             <a:prstDash val="solid"/>
           </a:ln>
@@ -2930,14 +2976,14 @@
       </p:sp>
       <p:sp>
         <p:nvSpPr>
-          <p:cNvPr id="76" name="Shape 74"/>
-          <p:cNvSpPr/>
-          <p:nvPr/>
-        </p:nvSpPr>
-        <p:spPr>
-          <a:xfrm>
-            <a:off x="4870450" y="2133600"/>
-            <a:ext cx="0" cy="1308100"/>
+          <p:cNvPr id="78" name="Shape 76"/>
+          <p:cNvSpPr/>
+          <p:nvPr/>
+        </p:nvSpPr>
+        <p:spPr>
+          <a:xfrm>
+            <a:off x="8102600" y="2146300"/>
+            <a:ext cx="0" cy="4521200"/>
           </a:xfrm>
           <a:prstGeom prst="line">
             <a:avLst/>
@@ -2945,7 +2991,7 @@
           <a:noFill/>
           <a:ln w="12700">
             <a:solidFill>
-              <a:srgbClr val="8B3A3A"/>
+              <a:srgbClr val="8A2024"/>
             </a:solidFill>
             <a:prstDash val="solid"/>
           </a:ln>
@@ -2953,37 +2999,14 @@
       </p:sp>
       <p:sp>
         <p:nvSpPr>
-          <p:cNvPr id="77" name="Shape 75"/>
-          <p:cNvSpPr/>
-          <p:nvPr/>
-        </p:nvSpPr>
-        <p:spPr>
-          <a:xfrm>
-            <a:off x="4953000" y="2133600"/>
-            <a:ext cx="0" cy="1308100"/>
-          </a:xfrm>
-          <a:prstGeom prst="line">
-            <a:avLst/>
-          </a:prstGeom>
-          <a:noFill/>
-          <a:ln w="12700">
-            <a:solidFill>
-              <a:srgbClr val="8B3A3A"/>
-            </a:solidFill>
-            <a:prstDash val="solid"/>
-          </a:ln>
-        </p:spPr>
-      </p:sp>
-      <p:sp>
-        <p:nvSpPr>
-          <p:cNvPr id="78" name="Shape 76"/>
-          <p:cNvSpPr/>
-          <p:nvPr/>
-        </p:nvSpPr>
-        <p:spPr>
-          <a:xfrm>
-            <a:off x="8172450" y="2133600"/>
-            <a:ext cx="0" cy="1308100"/>
+          <p:cNvPr id="79" name="Shape 77"/>
+          <p:cNvSpPr/>
+          <p:nvPr/>
+        </p:nvSpPr>
+        <p:spPr>
+          <a:xfrm>
+            <a:off x="8172450" y="2146300"/>
+            <a:ext cx="0" cy="4521200"/>
           </a:xfrm>
           <a:prstGeom prst="line">
             <a:avLst/>
@@ -2999,145 +3022,7 @@
       </p:sp>
       <p:sp>
         <p:nvSpPr>
-          <p:cNvPr id="79" name="Shape 77"/>
-          <p:cNvSpPr/>
-          <p:nvPr/>
-        </p:nvSpPr>
-        <p:spPr>
-          <a:xfrm>
-            <a:off x="4870450" y="3848100"/>
-            <a:ext cx="0" cy="952500"/>
-          </a:xfrm>
-          <a:prstGeom prst="line">
-            <a:avLst/>
-          </a:prstGeom>
-          <a:noFill/>
-          <a:ln w="12700">
-            <a:solidFill>
-              <a:srgbClr val="8B3A3A"/>
-            </a:solidFill>
-            <a:prstDash val="solid"/>
-          </a:ln>
-        </p:spPr>
-      </p:sp>
-      <p:sp>
-        <p:nvSpPr>
-          <p:cNvPr id="80" name="Shape 78"/>
-          <p:cNvSpPr/>
-          <p:nvPr/>
-        </p:nvSpPr>
-        <p:spPr>
-          <a:xfrm>
-            <a:off x="4953000" y="3848100"/>
-            <a:ext cx="0" cy="952500"/>
-          </a:xfrm>
-          <a:prstGeom prst="line">
-            <a:avLst/>
-          </a:prstGeom>
-          <a:noFill/>
-          <a:ln w="12700">
-            <a:solidFill>
-              <a:srgbClr val="8B3A3A"/>
-            </a:solidFill>
-            <a:prstDash val="solid"/>
-          </a:ln>
-        </p:spPr>
-      </p:sp>
-      <p:sp>
-        <p:nvSpPr>
-          <p:cNvPr id="81" name="Shape 79"/>
-          <p:cNvSpPr/>
-          <p:nvPr/>
-        </p:nvSpPr>
-        <p:spPr>
-          <a:xfrm>
-            <a:off x="8172450" y="3848100"/>
-            <a:ext cx="0" cy="952500"/>
-          </a:xfrm>
-          <a:prstGeom prst="line">
-            <a:avLst/>
-          </a:prstGeom>
-          <a:noFill/>
-          <a:ln w="12700">
-            <a:solidFill>
-              <a:srgbClr val="008000"/>
-            </a:solidFill>
-            <a:prstDash val="solid"/>
-          </a:ln>
-        </p:spPr>
-      </p:sp>
-      <p:sp>
-        <p:nvSpPr>
-          <p:cNvPr id="82" name="Shape 80"/>
-          <p:cNvSpPr/>
-          <p:nvPr/>
-        </p:nvSpPr>
-        <p:spPr>
-          <a:xfrm>
-            <a:off x="4870450" y="5207000"/>
-            <a:ext cx="0" cy="965200"/>
-          </a:xfrm>
-          <a:prstGeom prst="line">
-            <a:avLst/>
-          </a:prstGeom>
-          <a:noFill/>
-          <a:ln w="12700">
-            <a:solidFill>
-              <a:srgbClr val="8B3A3A"/>
-            </a:solidFill>
-            <a:prstDash val="solid"/>
-          </a:ln>
-        </p:spPr>
-      </p:sp>
-      <p:sp>
-        <p:nvSpPr>
-          <p:cNvPr id="83" name="Shape 81"/>
-          <p:cNvSpPr/>
-          <p:nvPr/>
-        </p:nvSpPr>
-        <p:spPr>
-          <a:xfrm>
-            <a:off x="4953000" y="5207000"/>
-            <a:ext cx="0" cy="965200"/>
-          </a:xfrm>
-          <a:prstGeom prst="line">
-            <a:avLst/>
-          </a:prstGeom>
-          <a:noFill/>
-          <a:ln w="12700">
-            <a:solidFill>
-              <a:srgbClr val="8B3A3A"/>
-            </a:solidFill>
-            <a:prstDash val="solid"/>
-          </a:ln>
-        </p:spPr>
-      </p:sp>
-      <p:sp>
-        <p:nvSpPr>
-          <p:cNvPr id="84" name="Shape 82"/>
-          <p:cNvSpPr/>
-          <p:nvPr/>
-        </p:nvSpPr>
-        <p:spPr>
-          <a:xfrm>
-            <a:off x="8172450" y="5207000"/>
-            <a:ext cx="0" cy="965200"/>
-          </a:xfrm>
-          <a:prstGeom prst="line">
-            <a:avLst/>
-          </a:prstGeom>
-          <a:noFill/>
-          <a:ln w="12700">
-            <a:solidFill>
-              <a:srgbClr val="008000"/>
-            </a:solidFill>
-            <a:prstDash val="solid"/>
-          </a:ln>
-        </p:spPr>
-      </p:sp>
-      <p:sp>
-        <p:nvSpPr>
-          <p:cNvPr id="85" name="Text 83"/>
+          <p:cNvPr id="80" name="Text 78"/>
           <p:cNvSpPr/>
           <p:nvPr/>
         </p:nvSpPr>
@@ -3179,7 +3064,7 @@
       </p:sp>
       <p:sp>
         <p:nvSpPr>
-          <p:cNvPr id="86" name="Text 84"/>
+          <p:cNvPr id="81" name="Text 79"/>
           <p:cNvSpPr/>
           <p:nvPr/>
         </p:nvSpPr>
@@ -3221,7 +3106,7 @@
       </p:sp>
       <p:sp>
         <p:nvSpPr>
-          <p:cNvPr id="87" name="Text 85"/>
+          <p:cNvPr id="82" name="Text 80"/>
           <p:cNvSpPr/>
           <p:nvPr/>
         </p:nvSpPr>
@@ -3263,7 +3148,7 @@
       </p:sp>
       <p:sp>
         <p:nvSpPr>
-          <p:cNvPr id="88" name="Shape 86"/>
+          <p:cNvPr id="83" name="Shape 81"/>
           <p:cNvSpPr/>
           <p:nvPr/>
         </p:nvSpPr>
@@ -3283,7 +3168,7 @@
       </p:sp>
       <p:sp>
         <p:nvSpPr>
-          <p:cNvPr id="89" name="Text 87"/>
+          <p:cNvPr id="84" name="Text 82"/>
           <p:cNvSpPr/>
           <p:nvPr/>
         </p:nvSpPr>
@@ -3325,7 +3210,7 @@
       </p:sp>
       <p:sp>
         <p:nvSpPr>
-          <p:cNvPr id="90" name="Text 88"/>
+          <p:cNvPr id="85" name="Text 83"/>
           <p:cNvSpPr/>
           <p:nvPr/>
         </p:nvSpPr>
@@ -3367,7 +3252,7 @@
       </p:sp>
       <p:sp>
         <p:nvSpPr>
-          <p:cNvPr id="91" name="Text 89"/>
+          <p:cNvPr id="86" name="Text 84"/>
           <p:cNvSpPr/>
           <p:nvPr/>
         </p:nvSpPr>
@@ -3409,7 +3294,7 @@
       </p:sp>
       <p:sp>
         <p:nvSpPr>
-          <p:cNvPr id="92" name="Shape 90"/>
+          <p:cNvPr id="87" name="Shape 85"/>
           <p:cNvSpPr/>
           <p:nvPr/>
         </p:nvSpPr>
@@ -3429,7 +3314,7 @@
       </p:sp>
       <p:sp>
         <p:nvSpPr>
-          <p:cNvPr id="93" name="Text 91"/>
+          <p:cNvPr id="88" name="Text 86"/>
           <p:cNvSpPr/>
           <p:nvPr/>
         </p:nvSpPr>
@@ -3471,7 +3356,7 @@
       </p:sp>
       <p:sp>
         <p:nvSpPr>
-          <p:cNvPr id="94" name="Text 92"/>
+          <p:cNvPr id="89" name="Text 87"/>
           <p:cNvSpPr/>
           <p:nvPr/>
         </p:nvSpPr>
@@ -3513,7 +3398,7 @@
       </p:sp>
       <p:sp>
         <p:nvSpPr>
-          <p:cNvPr id="95" name="Text 93"/>
+          <p:cNvPr id="90" name="Text 88"/>
           <p:cNvSpPr/>
           <p:nvPr/>
         </p:nvSpPr>
@@ -3555,7 +3440,7 @@
       </p:sp>
       <p:sp>
         <p:nvSpPr>
-          <p:cNvPr id="96" name="Shape 94"/>
+          <p:cNvPr id="91" name="Shape 89"/>
           <p:cNvSpPr/>
           <p:nvPr/>
         </p:nvSpPr>
@@ -3575,7 +3460,7 @@
       </p:sp>
       <p:sp>
         <p:nvSpPr>
-          <p:cNvPr id="97" name="Text 95"/>
+          <p:cNvPr id="92" name="Text 90"/>
           <p:cNvSpPr/>
           <p:nvPr/>
         </p:nvSpPr>
@@ -3617,7 +3502,7 @@
       </p:sp>
       <p:sp>
         <p:nvSpPr>
-          <p:cNvPr id="98" name="Text 96"/>
+          <p:cNvPr id="93" name="Text 91"/>
           <p:cNvSpPr/>
           <p:nvPr/>
         </p:nvSpPr>
@@ -3659,7 +3544,7 @@
       </p:sp>
       <p:sp>
         <p:nvSpPr>
-          <p:cNvPr id="99" name="Text 97"/>
+          <p:cNvPr id="94" name="Text 92"/>
           <p:cNvSpPr/>
           <p:nvPr/>
         </p:nvSpPr>
@@ -3701,14 +3586,14 @@
       </p:sp>
       <p:sp>
         <p:nvSpPr>
-          <p:cNvPr id="100" name="Shape 98"/>
-          <p:cNvSpPr/>
-          <p:nvPr/>
-        </p:nvSpPr>
-        <p:spPr>
-          <a:xfrm>
-            <a:off x="1054100" y="2743200"/>
-            <a:ext cx="76200" cy="914400"/>
+          <p:cNvPr id="95" name="Shape 93"/>
+          <p:cNvSpPr/>
+          <p:nvPr/>
+        </p:nvSpPr>
+        <p:spPr>
+          <a:xfrm>
+            <a:off x="1054100" y="2730500"/>
+            <a:ext cx="76200" cy="635000"/>
           </a:xfrm>
           <a:prstGeom prst="arc">
             <a:avLst>
@@ -3726,14 +3611,14 @@
       </p:sp>
       <p:sp>
         <p:nvSpPr>
-          <p:cNvPr id="101" name="Shape 99"/>
-          <p:cNvSpPr/>
-          <p:nvPr/>
-        </p:nvSpPr>
-        <p:spPr>
-          <a:xfrm>
-            <a:off x="1397000" y="2743200"/>
-            <a:ext cx="76200" cy="914400"/>
+          <p:cNvPr id="96" name="Shape 94"/>
+          <p:cNvSpPr/>
+          <p:nvPr/>
+        </p:nvSpPr>
+        <p:spPr>
+          <a:xfrm>
+            <a:off x="1397000" y="2730500"/>
+            <a:ext cx="76200" cy="635000"/>
           </a:xfrm>
           <a:prstGeom prst="arc">
             <a:avLst>
@@ -3751,14 +3636,14 @@
       </p:sp>
       <p:sp>
         <p:nvSpPr>
-          <p:cNvPr id="102" name="Shape 100"/>
-          <p:cNvSpPr/>
-          <p:nvPr/>
-        </p:nvSpPr>
-        <p:spPr>
-          <a:xfrm>
-            <a:off x="984250" y="4076700"/>
-            <a:ext cx="76200" cy="939800"/>
+          <p:cNvPr id="97" name="Shape 95"/>
+          <p:cNvSpPr/>
+          <p:nvPr/>
+        </p:nvSpPr>
+        <p:spPr>
+          <a:xfrm>
+            <a:off x="984250" y="4102100"/>
+            <a:ext cx="76200" cy="622300"/>
           </a:xfrm>
           <a:prstGeom prst="arc">
             <a:avLst>
@@ -3776,14 +3661,14 @@
       </p:sp>
       <p:sp>
         <p:nvSpPr>
-          <p:cNvPr id="103" name="Shape 101"/>
-          <p:cNvSpPr/>
-          <p:nvPr/>
-        </p:nvSpPr>
-        <p:spPr>
-          <a:xfrm>
-            <a:off x="1346200" y="4076700"/>
-            <a:ext cx="76200" cy="939800"/>
+          <p:cNvPr id="98" name="Shape 96"/>
+          <p:cNvSpPr/>
+          <p:nvPr/>
+        </p:nvSpPr>
+        <p:spPr>
+          <a:xfrm>
+            <a:off x="1346200" y="4102100"/>
+            <a:ext cx="76200" cy="622300"/>
           </a:xfrm>
           <a:prstGeom prst="arc">
             <a:avLst>
@@ -3801,14 +3686,14 @@
       </p:sp>
       <p:sp>
         <p:nvSpPr>
-          <p:cNvPr id="104" name="Shape 102"/>
+          <p:cNvPr id="99" name="Shape 97"/>
           <p:cNvSpPr/>
           <p:nvPr/>
         </p:nvSpPr>
         <p:spPr>
           <a:xfrm>
             <a:off x="984250" y="5397500"/>
-            <a:ext cx="76200" cy="939800"/>
+            <a:ext cx="76200" cy="647700"/>
           </a:xfrm>
           <a:prstGeom prst="arc">
             <a:avLst>
@@ -3826,14 +3711,14 @@
       </p:sp>
       <p:sp>
         <p:nvSpPr>
-          <p:cNvPr id="105" name="Shape 103"/>
+          <p:cNvPr id="100" name="Shape 98"/>
           <p:cNvSpPr/>
           <p:nvPr/>
         </p:nvSpPr>
         <p:spPr>
           <a:xfrm>
             <a:off x="1339850" y="5397500"/>
-            <a:ext cx="76200" cy="939800"/>
+            <a:ext cx="76200" cy="647700"/>
           </a:xfrm>
           <a:prstGeom prst="arc">
             <a:avLst>
@@ -3851,7 +3736,7 @@
       </p:sp>
       <p:sp>
         <p:nvSpPr>
-          <p:cNvPr id="106" name="Shape 104"/>
+          <p:cNvPr id="101" name="Shape 99"/>
           <p:cNvSpPr/>
           <p:nvPr/>
         </p:nvSpPr>
@@ -3871,13 +3756,13 @@
       </p:sp>
       <p:sp>
         <p:nvSpPr>
-          <p:cNvPr id="107" name="Text 105"/>
-          <p:cNvSpPr/>
-          <p:nvPr/>
-        </p:nvSpPr>
-        <p:spPr>
-          <a:xfrm>
-            <a:off x="1574800" y="2298700"/>
+          <p:cNvPr id="102" name="Text 100"/>
+          <p:cNvSpPr/>
+          <p:nvPr/>
+        </p:nvSpPr>
+        <p:spPr>
+          <a:xfrm>
+            <a:off x="1778000" y="2247900"/>
             <a:ext cx="3251200" cy="381000"/>
           </a:xfrm>
           <a:prstGeom prst="rect">
@@ -3892,12 +3777,12 @@
           <a:p>
             <a:pPr algn="l" indent="0" marL="0">
               <a:lnSpc>
-                <a:spcPts val="1440"/>
-              </a:lnSpc>
-              <a:buNone/>
-            </a:pPr>
-            <a:r>
-              <a:rPr lang="en-US" sz="1200" b="1" dirty="0">
+                <a:spcPts val="1920"/>
+              </a:lnSpc>
+              <a:buNone/>
+            </a:pPr>
+            <a:r>
+              <a:rPr lang="en-US" sz="1600" b="1" dirty="0">
                 <a:solidFill>
                   <a:srgbClr val="0000FF"/>
                 </a:solidFill>
@@ -3909,12 +3794,12 @@
             </a:r>
             <a:pPr algn="l" indent="0" marL="0">
               <a:lnSpc>
-                <a:spcPts val="1440"/>
-              </a:lnSpc>
-              <a:buNone/>
-            </a:pPr>
-            <a:r>
-              <a:rPr lang="en-US" sz="1200" b="1" dirty="0">
+                <a:spcPts val="1920"/>
+              </a:lnSpc>
+              <a:buNone/>
+            </a:pPr>
+            <a:r>
+              <a:rPr lang="en-US" sz="1600" b="1" dirty="0">
                 <a:solidFill>
                   <a:srgbClr val="FF0000"/>
                 </a:solidFill>
@@ -3924,13 +3809,13 @@
               </a:rPr>
               <a:t>(as if λ=0)</a:t>
             </a:r>
-            <a:endParaRPr lang="en-US" sz="1200" dirty="0"/>
-          </a:p>
-        </p:txBody>
-      </p:sp>
-      <p:sp>
-        <p:nvSpPr>
-          <p:cNvPr id="108" name="Shape 106"/>
+            <a:endParaRPr lang="en-US" sz="1600" dirty="0"/>
+          </a:p>
+        </p:txBody>
+      </p:sp>
+      <p:sp>
+        <p:nvSpPr>
+          <p:cNvPr id="103" name="Shape 101"/>
           <p:cNvSpPr/>
           <p:nvPr/>
         </p:nvSpPr>
@@ -3952,7 +3837,7 @@
       </p:sp>
       <p:sp>
         <p:nvSpPr>
-          <p:cNvPr id="109" name="Text 107"/>
+          <p:cNvPr id="104" name="Text 102"/>
           <p:cNvSpPr/>
           <p:nvPr/>
         </p:nvSpPr>
@@ -4011,7 +3896,7 @@
       </p:sp>
       <p:sp>
         <p:nvSpPr>
-          <p:cNvPr id="110" name="Text 108"/>
+          <p:cNvPr id="105" name="Text 103"/>
           <p:cNvSpPr/>
           <p:nvPr/>
         </p:nvSpPr>
@@ -4053,7 +3938,7 @@
       </p:sp>
       <p:sp>
         <p:nvSpPr>
-          <p:cNvPr id="111" name="Text 109"/>
+          <p:cNvPr id="106" name="Text 104"/>
           <p:cNvSpPr/>
           <p:nvPr/>
         </p:nvSpPr>
@@ -4135,7 +4020,7 @@
       </p:sp>
       <p:sp>
         <p:nvSpPr>
-          <p:cNvPr id="112" name="Text 110"/>
+          <p:cNvPr id="107" name="Text 105"/>
           <p:cNvSpPr/>
           <p:nvPr/>
         </p:nvSpPr>
@@ -4177,7 +4062,7 @@
       </p:sp>
       <p:sp>
         <p:nvSpPr>
-          <p:cNvPr id="113" name="Text 111"/>
+          <p:cNvPr id="108" name="Text 106"/>
           <p:cNvSpPr/>
           <p:nvPr/>
         </p:nvSpPr>
@@ -4253,7 +4138,7 @@
       </p:sp>
       <p:sp>
         <p:nvSpPr>
-          <p:cNvPr id="114" name="Shape 112"/>
+          <p:cNvPr id="109" name="Shape 107"/>
           <p:cNvSpPr/>
           <p:nvPr/>
         </p:nvSpPr>
@@ -4275,7 +4160,7 @@
       </p:sp>
       <p:sp>
         <p:nvSpPr>
-          <p:cNvPr id="115" name="Shape 113"/>
+          <p:cNvPr id="110" name="Shape 108"/>
           <p:cNvSpPr/>
           <p:nvPr/>
         </p:nvSpPr>
@@ -4297,7 +4182,7 @@
       </p:sp>
       <p:sp>
         <p:nvSpPr>
-          <p:cNvPr id="116" name="Shape 114"/>
+          <p:cNvPr id="111" name="Shape 109"/>
           <p:cNvSpPr/>
           <p:nvPr/>
         </p:nvSpPr>
@@ -4320,7 +4205,7 @@
       </p:sp>
       <p:sp>
         <p:nvSpPr>
-          <p:cNvPr id="117" name="Shape 115"/>
+          <p:cNvPr id="112" name="Shape 110"/>
           <p:cNvSpPr/>
           <p:nvPr/>
         </p:nvSpPr>
@@ -4343,7 +4228,7 @@
       </p:sp>
       <p:sp>
         <p:nvSpPr>
-          <p:cNvPr id="118" name="Shape 116"/>
+          <p:cNvPr id="113" name="Shape 111"/>
           <p:cNvSpPr/>
           <p:nvPr/>
         </p:nvSpPr>
@@ -4366,7 +4251,7 @@
       </p:sp>
       <p:sp>
         <p:nvSpPr>
-          <p:cNvPr id="119" name="Shape 117"/>
+          <p:cNvPr id="114" name="Shape 112"/>
           <p:cNvSpPr/>
           <p:nvPr/>
         </p:nvSpPr>
@@ -4389,7 +4274,7 @@
       </p:sp>
       <p:sp>
         <p:nvSpPr>
-          <p:cNvPr id="120" name="Text 118"/>
+          <p:cNvPr id="115" name="Text 113"/>
           <p:cNvSpPr/>
           <p:nvPr/>
         </p:nvSpPr>
@@ -4431,7 +4316,7 @@
       </p:sp>
       <p:sp>
         <p:nvSpPr>
-          <p:cNvPr id="121" name="Text 119"/>
+          <p:cNvPr id="116" name="Text 114"/>
           <p:cNvSpPr/>
           <p:nvPr/>
         </p:nvSpPr>
@@ -4473,7 +4358,7 @@
       </p:sp>
       <p:sp>
         <p:nvSpPr>
-          <p:cNvPr id="122" name="Text 120"/>
+          <p:cNvPr id="117" name="Text 115"/>
           <p:cNvSpPr/>
           <p:nvPr/>
         </p:nvSpPr>
@@ -4515,7 +4400,7 @@
       </p:sp>
       <p:sp>
         <p:nvSpPr>
-          <p:cNvPr id="123" name="Text 121"/>
+          <p:cNvPr id="118" name="Text 116"/>
           <p:cNvSpPr/>
           <p:nvPr/>
         </p:nvSpPr>
@@ -4557,7 +4442,7 @@
       </p:sp>
       <p:sp>
         <p:nvSpPr>
-          <p:cNvPr id="124" name="Text 122"/>
+          <p:cNvPr id="119" name="Text 117"/>
           <p:cNvSpPr/>
           <p:nvPr/>
         </p:nvSpPr>
@@ -4599,7 +4484,7 @@
       </p:sp>
       <p:sp>
         <p:nvSpPr>
-          <p:cNvPr id="125" name="Text 123"/>
+          <p:cNvPr id="120" name="Text 118"/>
           <p:cNvSpPr/>
           <p:nvPr/>
         </p:nvSpPr>
@@ -4641,7 +4526,7 @@
       </p:sp>
       <p:sp>
         <p:nvSpPr>
-          <p:cNvPr id="126" name="Text 124"/>
+          <p:cNvPr id="121" name="Text 119"/>
           <p:cNvSpPr/>
           <p:nvPr/>
         </p:nvSpPr>
@@ -4683,7 +4568,7 @@
       </p:sp>
       <p:sp>
         <p:nvSpPr>
-          <p:cNvPr id="127" name="Text 125"/>
+          <p:cNvPr id="122" name="Text 120"/>
           <p:cNvSpPr/>
           <p:nvPr/>
         </p:nvSpPr>
@@ -4725,7 +4610,7 @@
       </p:sp>
       <p:sp>
         <p:nvSpPr>
-          <p:cNvPr id="128" name="Text 126"/>
+          <p:cNvPr id="123" name="Text 121"/>
           <p:cNvSpPr/>
           <p:nvPr/>
         </p:nvSpPr>
@@ -4767,7 +4652,7 @@
       </p:sp>
       <p:sp>
         <p:nvSpPr>
-          <p:cNvPr id="129" name="Text 127"/>
+          <p:cNvPr id="124" name="Text 122"/>
           <p:cNvSpPr/>
           <p:nvPr/>
         </p:nvSpPr>
@@ -4809,7 +4694,7 @@
       </p:sp>
       <p:sp>
         <p:nvSpPr>
-          <p:cNvPr id="130" name="Text 128"/>
+          <p:cNvPr id="125" name="Text 123"/>
           <p:cNvSpPr/>
           <p:nvPr/>
         </p:nvSpPr>
@@ -4851,7 +4736,7 @@
       </p:sp>
       <p:sp>
         <p:nvSpPr>
-          <p:cNvPr id="131" name="Text 129"/>
+          <p:cNvPr id="126" name="Text 124"/>
           <p:cNvSpPr/>
           <p:nvPr/>
         </p:nvSpPr>
@@ -4893,7 +4778,7 @@
       </p:sp>
       <p:sp>
         <p:nvSpPr>
-          <p:cNvPr id="132" name="Text 130"/>
+          <p:cNvPr id="127" name="Text 125"/>
           <p:cNvSpPr/>
           <p:nvPr/>
         </p:nvSpPr>
@@ -4935,7 +4820,7 @@
       </p:sp>
       <p:sp>
         <p:nvSpPr>
-          <p:cNvPr id="133" name="Text 131"/>
+          <p:cNvPr id="128" name="Text 126"/>
           <p:cNvSpPr/>
           <p:nvPr/>
         </p:nvSpPr>
@@ -4977,7 +4862,7 @@
       </p:sp>
       <p:sp>
         <p:nvSpPr>
-          <p:cNvPr id="134" name="Text 132"/>
+          <p:cNvPr id="129" name="Text 127"/>
           <p:cNvSpPr/>
           <p:nvPr/>
         </p:nvSpPr>
@@ -5019,7 +4904,7 @@
       </p:sp>
       <p:sp>
         <p:nvSpPr>
-          <p:cNvPr id="135" name="Shape 133"/>
+          <p:cNvPr id="130" name="Shape 128"/>
           <p:cNvSpPr/>
           <p:nvPr/>
         </p:nvSpPr>
@@ -5041,7 +4926,7 @@
       </p:sp>
       <p:sp>
         <p:nvSpPr>
-          <p:cNvPr id="136" name="Text 134"/>
+          <p:cNvPr id="131" name="Text 129"/>
           <p:cNvSpPr/>
           <p:nvPr/>
         </p:nvSpPr>
@@ -5100,7 +4985,7 @@
       </p:sp>
       <p:sp>
         <p:nvSpPr>
-          <p:cNvPr id="137" name="Text 135"/>
+          <p:cNvPr id="132" name="Text 130"/>
           <p:cNvSpPr/>
           <p:nvPr/>
         </p:nvSpPr>
@@ -5142,7 +5027,7 @@
       </p:sp>
       <p:sp>
         <p:nvSpPr>
-          <p:cNvPr id="138" name="Text 136"/>
+          <p:cNvPr id="133" name="Text 131"/>
           <p:cNvSpPr/>
           <p:nvPr/>
         </p:nvSpPr>
@@ -5224,7 +5109,7 @@
       </p:sp>
       <p:sp>
         <p:nvSpPr>
-          <p:cNvPr id="139" name="Text 137"/>
+          <p:cNvPr id="134" name="Text 132"/>
           <p:cNvSpPr/>
           <p:nvPr/>
         </p:nvSpPr>
@@ -5266,7 +5151,7 @@
       </p:sp>
       <p:sp>
         <p:nvSpPr>
-          <p:cNvPr id="140" name="Text 138"/>
+          <p:cNvPr id="135" name="Text 133"/>
           <p:cNvSpPr/>
           <p:nvPr/>
         </p:nvSpPr>
@@ -5342,7 +5227,7 @@
       </p:sp>
       <p:sp>
         <p:nvSpPr>
-          <p:cNvPr id="141" name="Shape 139"/>
+          <p:cNvPr id="136" name="Shape 134"/>
           <p:cNvSpPr/>
           <p:nvPr/>
         </p:nvSpPr>
@@ -5364,7 +5249,7 @@
       </p:sp>
       <p:sp>
         <p:nvSpPr>
-          <p:cNvPr id="142" name="Shape 140"/>
+          <p:cNvPr id="137" name="Shape 135"/>
           <p:cNvSpPr/>
           <p:nvPr/>
         </p:nvSpPr>
@@ -5386,7 +5271,7 @@
       </p:sp>
       <p:sp>
         <p:nvSpPr>
-          <p:cNvPr id="143" name="Shape 141"/>
+          <p:cNvPr id="138" name="Shape 136"/>
           <p:cNvSpPr/>
           <p:nvPr/>
         </p:nvSpPr>
@@ -5409,7 +5294,7 @@
       </p:sp>
       <p:sp>
         <p:nvSpPr>
-          <p:cNvPr id="144" name="Shape 142"/>
+          <p:cNvPr id="139" name="Shape 137"/>
           <p:cNvSpPr/>
           <p:nvPr/>
         </p:nvSpPr>
@@ -5432,7 +5317,7 @@
       </p:sp>
       <p:sp>
         <p:nvSpPr>
-          <p:cNvPr id="145" name="Shape 143"/>
+          <p:cNvPr id="140" name="Shape 138"/>
           <p:cNvSpPr/>
           <p:nvPr/>
         </p:nvSpPr>
@@ -5455,7 +5340,7 @@
       </p:sp>
       <p:sp>
         <p:nvSpPr>
-          <p:cNvPr id="146" name="Shape 144"/>
+          <p:cNvPr id="141" name="Shape 139"/>
           <p:cNvSpPr/>
           <p:nvPr/>
         </p:nvSpPr>
@@ -5478,7 +5363,7 @@
       </p:sp>
       <p:sp>
         <p:nvSpPr>
-          <p:cNvPr id="147" name="Text 145"/>
+          <p:cNvPr id="142" name="Text 140"/>
           <p:cNvSpPr/>
           <p:nvPr/>
         </p:nvSpPr>
@@ -5520,7 +5405,7 @@
       </p:sp>
       <p:sp>
         <p:nvSpPr>
-          <p:cNvPr id="148" name="Text 146"/>
+          <p:cNvPr id="143" name="Text 141"/>
           <p:cNvSpPr/>
           <p:nvPr/>
         </p:nvSpPr>
@@ -5562,7 +5447,7 @@
       </p:sp>
       <p:sp>
         <p:nvSpPr>
-          <p:cNvPr id="149" name="Text 147"/>
+          <p:cNvPr id="144" name="Text 142"/>
           <p:cNvSpPr/>
           <p:nvPr/>
         </p:nvSpPr>
@@ -5604,7 +5489,7 @@
       </p:sp>
       <p:sp>
         <p:nvSpPr>
-          <p:cNvPr id="150" name="Text 148"/>
+          <p:cNvPr id="145" name="Text 143"/>
           <p:cNvSpPr/>
           <p:nvPr/>
         </p:nvSpPr>
@@ -5646,7 +5531,7 @@
       </p:sp>
       <p:sp>
         <p:nvSpPr>
-          <p:cNvPr id="151" name="Text 149"/>
+          <p:cNvPr id="146" name="Text 144"/>
           <p:cNvSpPr/>
           <p:nvPr/>
         </p:nvSpPr>
@@ -5688,7 +5573,7 @@
       </p:sp>
       <p:sp>
         <p:nvSpPr>
-          <p:cNvPr id="152" name="Text 150"/>
+          <p:cNvPr id="147" name="Text 145"/>
           <p:cNvSpPr/>
           <p:nvPr/>
         </p:nvSpPr>
@@ -5730,7 +5615,7 @@
       </p:sp>
       <p:sp>
         <p:nvSpPr>
-          <p:cNvPr id="153" name="Text 151"/>
+          <p:cNvPr id="148" name="Text 146"/>
           <p:cNvSpPr/>
           <p:nvPr/>
         </p:nvSpPr>
@@ -5772,7 +5657,7 @@
       </p:sp>
       <p:sp>
         <p:nvSpPr>
-          <p:cNvPr id="154" name="Text 152"/>
+          <p:cNvPr id="149" name="Text 147"/>
           <p:cNvSpPr/>
           <p:nvPr/>
         </p:nvSpPr>
@@ -5814,7 +5699,7 @@
       </p:sp>
       <p:sp>
         <p:nvSpPr>
-          <p:cNvPr id="155" name="Text 153"/>
+          <p:cNvPr id="150" name="Text 148"/>
           <p:cNvSpPr/>
           <p:nvPr/>
         </p:nvSpPr>
@@ -5856,7 +5741,7 @@
       </p:sp>
       <p:sp>
         <p:nvSpPr>
-          <p:cNvPr id="156" name="Text 154"/>
+          <p:cNvPr id="151" name="Text 149"/>
           <p:cNvSpPr/>
           <p:nvPr/>
         </p:nvSpPr>
@@ -5898,7 +5783,7 @@
       </p:sp>
       <p:sp>
         <p:nvSpPr>
-          <p:cNvPr id="157" name="Text 155"/>
+          <p:cNvPr id="152" name="Text 150"/>
           <p:cNvSpPr/>
           <p:nvPr/>
         </p:nvSpPr>
@@ -5940,7 +5825,7 @@
       </p:sp>
       <p:sp>
         <p:nvSpPr>
-          <p:cNvPr id="158" name="Text 156"/>
+          <p:cNvPr id="153" name="Text 151"/>
           <p:cNvSpPr/>
           <p:nvPr/>
         </p:nvSpPr>
@@ -5982,7 +5867,7 @@
       </p:sp>
       <p:sp>
         <p:nvSpPr>
-          <p:cNvPr id="159" name="Text 157"/>
+          <p:cNvPr id="154" name="Text 152"/>
           <p:cNvSpPr/>
           <p:nvPr/>
         </p:nvSpPr>
@@ -6024,7 +5909,7 @@
       </p:sp>
       <p:sp>
         <p:nvSpPr>
-          <p:cNvPr id="160" name="Text 158"/>
+          <p:cNvPr id="155" name="Text 153"/>
           <p:cNvSpPr/>
           <p:nvPr/>
         </p:nvSpPr>
@@ -6066,7 +5951,7 @@
       </p:sp>
       <p:sp>
         <p:nvSpPr>
-          <p:cNvPr id="161" name="Text 159"/>
+          <p:cNvPr id="156" name="Text 154"/>
           <p:cNvSpPr/>
           <p:nvPr/>
         </p:nvSpPr>
@@ -6108,7 +5993,7 @@
       </p:sp>
       <p:sp>
         <p:nvSpPr>
-          <p:cNvPr id="162" name="Shape 160"/>
+          <p:cNvPr id="157" name="Shape 155"/>
           <p:cNvSpPr/>
           <p:nvPr/>
         </p:nvSpPr>
@@ -6130,7 +6015,7 @@
       </p:sp>
       <p:sp>
         <p:nvSpPr>
-          <p:cNvPr id="163" name="Text 161"/>
+          <p:cNvPr id="158" name="Text 156"/>
           <p:cNvSpPr/>
           <p:nvPr/>
         </p:nvSpPr>
@@ -6189,7 +6074,7 @@
       </p:sp>
       <p:sp>
         <p:nvSpPr>
-          <p:cNvPr id="164" name="Text 162"/>
+          <p:cNvPr id="159" name="Text 157"/>
           <p:cNvSpPr/>
           <p:nvPr/>
         </p:nvSpPr>
@@ -6231,7 +6116,7 @@
       </p:sp>
       <p:sp>
         <p:nvSpPr>
-          <p:cNvPr id="165" name="Text 163"/>
+          <p:cNvPr id="160" name="Text 158"/>
           <p:cNvSpPr/>
           <p:nvPr/>
         </p:nvSpPr>
@@ -6313,7 +6198,7 @@
       </p:sp>
       <p:sp>
         <p:nvSpPr>
-          <p:cNvPr id="166" name="Text 164"/>
+          <p:cNvPr id="161" name="Text 159"/>
           <p:cNvSpPr/>
           <p:nvPr/>
         </p:nvSpPr>
@@ -6355,7 +6240,7 @@
       </p:sp>
       <p:sp>
         <p:nvSpPr>
-          <p:cNvPr id="167" name="Text 165"/>
+          <p:cNvPr id="162" name="Text 160"/>
           <p:cNvSpPr/>
           <p:nvPr/>
         </p:nvSpPr>
@@ -6431,7 +6316,7 @@
       </p:sp>
       <p:sp>
         <p:nvSpPr>
-          <p:cNvPr id="168" name="Shape 166"/>
+          <p:cNvPr id="163" name="Shape 161"/>
           <p:cNvSpPr/>
           <p:nvPr/>
         </p:nvSpPr>
@@ -6453,7 +6338,7 @@
       </p:sp>
       <p:sp>
         <p:nvSpPr>
-          <p:cNvPr id="169" name="Shape 167"/>
+          <p:cNvPr id="164" name="Shape 162"/>
           <p:cNvSpPr/>
           <p:nvPr/>
         </p:nvSpPr>
@@ -6475,7 +6360,7 @@
       </p:sp>
       <p:sp>
         <p:nvSpPr>
-          <p:cNvPr id="170" name="Shape 168"/>
+          <p:cNvPr id="165" name="Shape 163"/>
           <p:cNvSpPr/>
           <p:nvPr/>
         </p:nvSpPr>
@@ -6498,7 +6383,7 @@
       </p:sp>
       <p:sp>
         <p:nvSpPr>
-          <p:cNvPr id="171" name="Shape 169"/>
+          <p:cNvPr id="166" name="Shape 164"/>
           <p:cNvSpPr/>
           <p:nvPr/>
         </p:nvSpPr>
@@ -6521,7 +6406,7 @@
       </p:sp>
       <p:sp>
         <p:nvSpPr>
-          <p:cNvPr id="172" name="Shape 170"/>
+          <p:cNvPr id="167" name="Shape 165"/>
           <p:cNvSpPr/>
           <p:nvPr/>
         </p:nvSpPr>
@@ -6544,7 +6429,7 @@
       </p:sp>
       <p:sp>
         <p:nvSpPr>
-          <p:cNvPr id="173" name="Shape 171"/>
+          <p:cNvPr id="168" name="Shape 166"/>
           <p:cNvSpPr/>
           <p:nvPr/>
         </p:nvSpPr>
@@ -6567,7 +6452,7 @@
       </p:sp>
       <p:sp>
         <p:nvSpPr>
-          <p:cNvPr id="174" name="Text 172"/>
+          <p:cNvPr id="169" name="Text 167"/>
           <p:cNvSpPr/>
           <p:nvPr/>
         </p:nvSpPr>
@@ -6609,7 +6494,7 @@
       </p:sp>
       <p:sp>
         <p:nvSpPr>
-          <p:cNvPr id="175" name="Text 173"/>
+          <p:cNvPr id="170" name="Text 168"/>
           <p:cNvSpPr/>
           <p:nvPr/>
         </p:nvSpPr>
@@ -6651,7 +6536,7 @@
       </p:sp>
       <p:sp>
         <p:nvSpPr>
-          <p:cNvPr id="176" name="Text 174"/>
+          <p:cNvPr id="171" name="Text 169"/>
           <p:cNvSpPr/>
           <p:nvPr/>
         </p:nvSpPr>
@@ -6693,7 +6578,7 @@
       </p:sp>
       <p:sp>
         <p:nvSpPr>
-          <p:cNvPr id="177" name="Text 175"/>
+          <p:cNvPr id="172" name="Text 170"/>
           <p:cNvSpPr/>
           <p:nvPr/>
         </p:nvSpPr>
@@ -6735,7 +6620,7 @@
       </p:sp>
       <p:sp>
         <p:nvSpPr>
-          <p:cNvPr id="178" name="Text 176"/>
+          <p:cNvPr id="173" name="Text 171"/>
           <p:cNvSpPr/>
           <p:nvPr/>
         </p:nvSpPr>
@@ -6777,7 +6662,7 @@
       </p:sp>
       <p:sp>
         <p:nvSpPr>
-          <p:cNvPr id="179" name="Text 177"/>
+          <p:cNvPr id="174" name="Text 172"/>
           <p:cNvSpPr/>
           <p:nvPr/>
         </p:nvSpPr>
@@ -6819,7 +6704,7 @@
       </p:sp>
       <p:sp>
         <p:nvSpPr>
-          <p:cNvPr id="180" name="Text 178"/>
+          <p:cNvPr id="175" name="Text 173"/>
           <p:cNvSpPr/>
           <p:nvPr/>
         </p:nvSpPr>
@@ -6861,7 +6746,7 @@
       </p:sp>
       <p:sp>
         <p:nvSpPr>
-          <p:cNvPr id="181" name="Text 179"/>
+          <p:cNvPr id="176" name="Text 174"/>
           <p:cNvSpPr/>
           <p:nvPr/>
         </p:nvSpPr>
@@ -6903,7 +6788,7 @@
       </p:sp>
       <p:sp>
         <p:nvSpPr>
-          <p:cNvPr id="182" name="Text 180"/>
+          <p:cNvPr id="177" name="Text 175"/>
           <p:cNvSpPr/>
           <p:nvPr/>
         </p:nvSpPr>
@@ -6945,7 +6830,7 @@
       </p:sp>
       <p:sp>
         <p:nvSpPr>
-          <p:cNvPr id="183" name="Text 181"/>
+          <p:cNvPr id="178" name="Text 176"/>
           <p:cNvSpPr/>
           <p:nvPr/>
         </p:nvSpPr>
@@ -6987,7 +6872,7 @@
       </p:sp>
       <p:sp>
         <p:nvSpPr>
-          <p:cNvPr id="184" name="Text 182"/>
+          <p:cNvPr id="179" name="Text 177"/>
           <p:cNvSpPr/>
           <p:nvPr/>
         </p:nvSpPr>
@@ -7029,7 +6914,7 @@
       </p:sp>
       <p:sp>
         <p:nvSpPr>
-          <p:cNvPr id="185" name="Text 183"/>
+          <p:cNvPr id="180" name="Text 178"/>
           <p:cNvSpPr/>
           <p:nvPr/>
         </p:nvSpPr>
@@ -7071,7 +6956,7 @@
       </p:sp>
       <p:sp>
         <p:nvSpPr>
-          <p:cNvPr id="186" name="Text 184"/>
+          <p:cNvPr id="181" name="Text 179"/>
           <p:cNvSpPr/>
           <p:nvPr/>
         </p:nvSpPr>
@@ -7113,7 +6998,7 @@
       </p:sp>
       <p:sp>
         <p:nvSpPr>
-          <p:cNvPr id="187" name="Text 185"/>
+          <p:cNvPr id="182" name="Text 180"/>
           <p:cNvSpPr/>
           <p:nvPr/>
         </p:nvSpPr>
@@ -7155,7 +7040,7 @@
       </p:sp>
       <p:sp>
         <p:nvSpPr>
-          <p:cNvPr id="188" name="Text 186"/>
+          <p:cNvPr id="183" name="Text 181"/>
           <p:cNvSpPr/>
           <p:nvPr/>
         </p:nvSpPr>
@@ -7197,7 +7082,7 @@
       </p:sp>
       <p:sp>
         <p:nvSpPr>
-          <p:cNvPr id="189" name="Shape 187"/>
+          <p:cNvPr id="184" name="Shape 182"/>
           <p:cNvSpPr/>
           <p:nvPr/>
         </p:nvSpPr>
@@ -7217,13 +7102,13 @@
       </p:sp>
       <p:sp>
         <p:nvSpPr>
-          <p:cNvPr id="190" name="Text 188"/>
-          <p:cNvSpPr/>
-          <p:nvPr/>
-        </p:nvSpPr>
-        <p:spPr>
-          <a:xfrm>
-            <a:off x="4876800" y="2298700"/>
+          <p:cNvPr id="185" name="Text 183"/>
+          <p:cNvSpPr/>
+          <p:nvPr/>
+        </p:nvSpPr>
+        <p:spPr>
+          <a:xfrm>
+            <a:off x="5080000" y="2247900"/>
             <a:ext cx="3251200" cy="381000"/>
           </a:xfrm>
           <a:prstGeom prst="rect">
@@ -7238,12 +7123,12 @@
           <a:p>
             <a:pPr algn="l" indent="0" marL="0">
               <a:lnSpc>
-                <a:spcPts val="1440"/>
-              </a:lnSpc>
-              <a:buNone/>
-            </a:pPr>
-            <a:r>
-              <a:rPr lang="en-US" sz="1200" b="1" dirty="0">
+                <a:spcPts val="1920"/>
+              </a:lnSpc>
+              <a:buNone/>
+            </a:pPr>
+            <a:r>
+              <a:rPr lang="en-US" sz="1600" b="1" dirty="0">
                 <a:solidFill>
                   <a:srgbClr val="0000FF"/>
                 </a:solidFill>
@@ -7255,12 +7140,12 @@
             </a:r>
             <a:pPr algn="l" indent="0" marL="0">
               <a:lnSpc>
-                <a:spcPts val="1440"/>
-              </a:lnSpc>
-              <a:buNone/>
-            </a:pPr>
-            <a:r>
-              <a:rPr lang="en-US" sz="1200" b="1" dirty="0">
+                <a:spcPts val="1920"/>
+              </a:lnSpc>
+              <a:buNone/>
+            </a:pPr>
+            <a:r>
+              <a:rPr lang="en-US" sz="1600" b="1" dirty="0">
                 <a:solidFill>
                   <a:srgbClr val="FF0000"/>
                 </a:solidFill>
@@ -7270,13 +7155,13 @@
               </a:rPr>
               <a:t>λ=3</a:t>
             </a:r>
-            <a:endParaRPr lang="en-US" sz="1200" dirty="0"/>
-          </a:p>
-        </p:txBody>
-      </p:sp>
-      <p:sp>
-        <p:nvSpPr>
-          <p:cNvPr id="191" name="Shape 189"/>
+            <a:endParaRPr lang="en-US" sz="1600" dirty="0"/>
+          </a:p>
+        </p:txBody>
+      </p:sp>
+      <p:sp>
+        <p:nvSpPr>
+          <p:cNvPr id="186" name="Shape 184"/>
           <p:cNvSpPr/>
           <p:nvPr/>
         </p:nvSpPr>
@@ -7298,7 +7183,7 @@
       </p:sp>
       <p:sp>
         <p:nvSpPr>
-          <p:cNvPr id="192" name="Text 190"/>
+          <p:cNvPr id="187" name="Text 185"/>
           <p:cNvSpPr/>
           <p:nvPr/>
         </p:nvSpPr>
@@ -7357,7 +7242,7 @@
       </p:sp>
       <p:sp>
         <p:nvSpPr>
-          <p:cNvPr id="193" name="Text 191"/>
+          <p:cNvPr id="188" name="Text 186"/>
           <p:cNvSpPr/>
           <p:nvPr/>
         </p:nvSpPr>
@@ -7399,7 +7284,7 @@
       </p:sp>
       <p:sp>
         <p:nvSpPr>
-          <p:cNvPr id="194" name="Text 192"/>
+          <p:cNvPr id="189" name="Text 187"/>
           <p:cNvSpPr/>
           <p:nvPr/>
         </p:nvSpPr>
@@ -7481,7 +7366,7 @@
       </p:sp>
       <p:sp>
         <p:nvSpPr>
-          <p:cNvPr id="195" name="Text 193"/>
+          <p:cNvPr id="190" name="Text 188"/>
           <p:cNvSpPr/>
           <p:nvPr/>
         </p:nvSpPr>
@@ -7523,7 +7408,7 @@
       </p:sp>
       <p:sp>
         <p:nvSpPr>
-          <p:cNvPr id="196" name="Text 194"/>
+          <p:cNvPr id="191" name="Text 189"/>
           <p:cNvSpPr/>
           <p:nvPr/>
         </p:nvSpPr>
@@ -7599,7 +7484,7 @@
       </p:sp>
       <p:sp>
         <p:nvSpPr>
-          <p:cNvPr id="197" name="Shape 195"/>
+          <p:cNvPr id="192" name="Shape 190"/>
           <p:cNvSpPr/>
           <p:nvPr/>
         </p:nvSpPr>
@@ -7621,7 +7506,7 @@
       </p:sp>
       <p:sp>
         <p:nvSpPr>
-          <p:cNvPr id="198" name="Shape 196"/>
+          <p:cNvPr id="193" name="Shape 191"/>
           <p:cNvSpPr/>
           <p:nvPr/>
         </p:nvSpPr>
@@ -7643,7 +7528,7 @@
       </p:sp>
       <p:sp>
         <p:nvSpPr>
-          <p:cNvPr id="199" name="Shape 197"/>
+          <p:cNvPr id="194" name="Shape 192"/>
           <p:cNvSpPr/>
           <p:nvPr/>
         </p:nvSpPr>
@@ -7666,7 +7551,7 @@
       </p:sp>
       <p:sp>
         <p:nvSpPr>
-          <p:cNvPr id="200" name="Shape 198"/>
+          <p:cNvPr id="195" name="Shape 193"/>
           <p:cNvSpPr/>
           <p:nvPr/>
         </p:nvSpPr>
@@ -7689,7 +7574,7 @@
       </p:sp>
       <p:sp>
         <p:nvSpPr>
-          <p:cNvPr id="201" name="Shape 199"/>
+          <p:cNvPr id="196" name="Shape 194"/>
           <p:cNvSpPr/>
           <p:nvPr/>
         </p:nvSpPr>
@@ -7712,7 +7597,7 @@
       </p:sp>
       <p:sp>
         <p:nvSpPr>
-          <p:cNvPr id="202" name="Shape 200"/>
+          <p:cNvPr id="197" name="Shape 195"/>
           <p:cNvSpPr/>
           <p:nvPr/>
         </p:nvSpPr>
@@ -7735,7 +7620,7 @@
       </p:sp>
       <p:sp>
         <p:nvSpPr>
-          <p:cNvPr id="203" name="Text 201"/>
+          <p:cNvPr id="198" name="Text 196"/>
           <p:cNvSpPr/>
           <p:nvPr/>
         </p:nvSpPr>
@@ -7777,7 +7662,7 @@
       </p:sp>
       <p:sp>
         <p:nvSpPr>
-          <p:cNvPr id="204" name="Text 202"/>
+          <p:cNvPr id="199" name="Text 197"/>
           <p:cNvSpPr/>
           <p:nvPr/>
         </p:nvSpPr>
@@ -7819,7 +7704,7 @@
       </p:sp>
       <p:sp>
         <p:nvSpPr>
-          <p:cNvPr id="205" name="Text 203"/>
+          <p:cNvPr id="200" name="Text 198"/>
           <p:cNvSpPr/>
           <p:nvPr/>
         </p:nvSpPr>
@@ -7861,7 +7746,7 @@
       </p:sp>
       <p:sp>
         <p:nvSpPr>
-          <p:cNvPr id="206" name="Text 204"/>
+          <p:cNvPr id="201" name="Text 199"/>
           <p:cNvSpPr/>
           <p:nvPr/>
         </p:nvSpPr>
@@ -7903,7 +7788,7 @@
       </p:sp>
       <p:sp>
         <p:nvSpPr>
-          <p:cNvPr id="207" name="Text 205"/>
+          <p:cNvPr id="202" name="Text 200"/>
           <p:cNvSpPr/>
           <p:nvPr/>
         </p:nvSpPr>
@@ -7945,7 +7830,7 @@
       </p:sp>
       <p:sp>
         <p:nvSpPr>
-          <p:cNvPr id="208" name="Text 206"/>
+          <p:cNvPr id="203" name="Text 201"/>
           <p:cNvSpPr/>
           <p:nvPr/>
         </p:nvSpPr>
@@ -7987,7 +7872,7 @@
       </p:sp>
       <p:sp>
         <p:nvSpPr>
-          <p:cNvPr id="209" name="Text 207"/>
+          <p:cNvPr id="204" name="Text 202"/>
           <p:cNvSpPr/>
           <p:nvPr/>
         </p:nvSpPr>
@@ -8029,7 +7914,7 @@
       </p:sp>
       <p:sp>
         <p:nvSpPr>
-          <p:cNvPr id="210" name="Text 208"/>
+          <p:cNvPr id="205" name="Text 203"/>
           <p:cNvSpPr/>
           <p:nvPr/>
         </p:nvSpPr>
@@ -8071,7 +7956,7 @@
       </p:sp>
       <p:sp>
         <p:nvSpPr>
-          <p:cNvPr id="211" name="Text 209"/>
+          <p:cNvPr id="206" name="Text 204"/>
           <p:cNvSpPr/>
           <p:nvPr/>
         </p:nvSpPr>
@@ -8113,7 +7998,7 @@
       </p:sp>
       <p:sp>
         <p:nvSpPr>
-          <p:cNvPr id="212" name="Text 210"/>
+          <p:cNvPr id="207" name="Text 205"/>
           <p:cNvSpPr/>
           <p:nvPr/>
         </p:nvSpPr>
@@ -8155,7 +8040,7 @@
       </p:sp>
       <p:sp>
         <p:nvSpPr>
-          <p:cNvPr id="213" name="Text 211"/>
+          <p:cNvPr id="208" name="Text 206"/>
           <p:cNvSpPr/>
           <p:nvPr/>
         </p:nvSpPr>
@@ -8197,7 +8082,7 @@
       </p:sp>
       <p:sp>
         <p:nvSpPr>
-          <p:cNvPr id="214" name="Text 212"/>
+          <p:cNvPr id="209" name="Text 207"/>
           <p:cNvSpPr/>
           <p:nvPr/>
         </p:nvSpPr>
@@ -8239,7 +8124,7 @@
       </p:sp>
       <p:sp>
         <p:nvSpPr>
-          <p:cNvPr id="215" name="Text 213"/>
+          <p:cNvPr id="210" name="Text 208"/>
           <p:cNvSpPr/>
           <p:nvPr/>
         </p:nvSpPr>
@@ -8281,7 +8166,7 @@
       </p:sp>
       <p:sp>
         <p:nvSpPr>
-          <p:cNvPr id="216" name="Text 214"/>
+          <p:cNvPr id="211" name="Text 209"/>
           <p:cNvSpPr/>
           <p:nvPr/>
         </p:nvSpPr>
@@ -8323,7 +8208,7 @@
       </p:sp>
       <p:sp>
         <p:nvSpPr>
-          <p:cNvPr id="217" name="Text 215"/>
+          <p:cNvPr id="212" name="Text 210"/>
           <p:cNvSpPr/>
           <p:nvPr/>
         </p:nvSpPr>
@@ -8365,7 +8250,7 @@
       </p:sp>
       <p:sp>
         <p:nvSpPr>
-          <p:cNvPr id="218" name="Shape 216"/>
+          <p:cNvPr id="213" name="Shape 211"/>
           <p:cNvSpPr/>
           <p:nvPr/>
         </p:nvSpPr>
@@ -8387,7 +8272,7 @@
       </p:sp>
       <p:sp>
         <p:nvSpPr>
-          <p:cNvPr id="219" name="Text 217"/>
+          <p:cNvPr id="214" name="Text 212"/>
           <p:cNvSpPr/>
           <p:nvPr/>
         </p:nvSpPr>
@@ -8446,7 +8331,7 @@
       </p:sp>
       <p:sp>
         <p:nvSpPr>
-          <p:cNvPr id="220" name="Text 218"/>
+          <p:cNvPr id="215" name="Text 213"/>
           <p:cNvSpPr/>
           <p:nvPr/>
         </p:nvSpPr>
@@ -8488,7 +8373,7 @@
       </p:sp>
       <p:sp>
         <p:nvSpPr>
-          <p:cNvPr id="221" name="Text 219"/>
+          <p:cNvPr id="216" name="Text 214"/>
           <p:cNvSpPr/>
           <p:nvPr/>
         </p:nvSpPr>
@@ -8570,7 +8455,7 @@
       </p:sp>
       <p:sp>
         <p:nvSpPr>
-          <p:cNvPr id="222" name="Text 220"/>
+          <p:cNvPr id="217" name="Text 215"/>
           <p:cNvSpPr/>
           <p:nvPr/>
         </p:nvSpPr>
@@ -8612,7 +8497,7 @@
       </p:sp>
       <p:sp>
         <p:nvSpPr>
-          <p:cNvPr id="223" name="Text 221"/>
+          <p:cNvPr id="218" name="Text 216"/>
           <p:cNvSpPr/>
           <p:nvPr/>
         </p:nvSpPr>
@@ -8688,7 +8573,7 @@
       </p:sp>
       <p:sp>
         <p:nvSpPr>
-          <p:cNvPr id="224" name="Shape 222"/>
+          <p:cNvPr id="219" name="Shape 217"/>
           <p:cNvSpPr/>
           <p:nvPr/>
         </p:nvSpPr>
@@ -8710,7 +8595,7 @@
       </p:sp>
       <p:sp>
         <p:nvSpPr>
-          <p:cNvPr id="225" name="Shape 223"/>
+          <p:cNvPr id="220" name="Shape 218"/>
           <p:cNvSpPr/>
           <p:nvPr/>
         </p:nvSpPr>
@@ -8732,7 +8617,7 @@
       </p:sp>
       <p:sp>
         <p:nvSpPr>
-          <p:cNvPr id="226" name="Shape 224"/>
+          <p:cNvPr id="221" name="Shape 219"/>
           <p:cNvSpPr/>
           <p:nvPr/>
         </p:nvSpPr>
@@ -8755,7 +8640,7 @@
       </p:sp>
       <p:sp>
         <p:nvSpPr>
-          <p:cNvPr id="227" name="Shape 225"/>
+          <p:cNvPr id="222" name="Shape 220"/>
           <p:cNvSpPr/>
           <p:nvPr/>
         </p:nvSpPr>
@@ -8778,7 +8663,7 @@
       </p:sp>
       <p:sp>
         <p:nvSpPr>
-          <p:cNvPr id="228" name="Shape 226"/>
+          <p:cNvPr id="223" name="Shape 221"/>
           <p:cNvSpPr/>
           <p:nvPr/>
         </p:nvSpPr>
@@ -8801,7 +8686,7 @@
       </p:sp>
       <p:sp>
         <p:nvSpPr>
-          <p:cNvPr id="229" name="Shape 227"/>
+          <p:cNvPr id="224" name="Shape 222"/>
           <p:cNvSpPr/>
           <p:nvPr/>
         </p:nvSpPr>
@@ -8824,7 +8709,7 @@
       </p:sp>
       <p:sp>
         <p:nvSpPr>
-          <p:cNvPr id="230" name="Text 228"/>
+          <p:cNvPr id="225" name="Text 223"/>
           <p:cNvSpPr/>
           <p:nvPr/>
         </p:nvSpPr>
@@ -8866,7 +8751,7 @@
       </p:sp>
       <p:sp>
         <p:nvSpPr>
-          <p:cNvPr id="231" name="Text 229"/>
+          <p:cNvPr id="226" name="Text 224"/>
           <p:cNvSpPr/>
           <p:nvPr/>
         </p:nvSpPr>
@@ -8908,7 +8793,7 @@
       </p:sp>
       <p:sp>
         <p:nvSpPr>
-          <p:cNvPr id="232" name="Text 230"/>
+          <p:cNvPr id="227" name="Text 225"/>
           <p:cNvSpPr/>
           <p:nvPr/>
         </p:nvSpPr>
@@ -8950,7 +8835,7 @@
       </p:sp>
       <p:sp>
         <p:nvSpPr>
-          <p:cNvPr id="233" name="Text 231"/>
+          <p:cNvPr id="228" name="Text 226"/>
           <p:cNvSpPr/>
           <p:nvPr/>
         </p:nvSpPr>
@@ -8992,7 +8877,7 @@
       </p:sp>
       <p:sp>
         <p:nvSpPr>
-          <p:cNvPr id="234" name="Text 232"/>
+          <p:cNvPr id="229" name="Text 227"/>
           <p:cNvSpPr/>
           <p:nvPr/>
         </p:nvSpPr>
@@ -9034,7 +8919,7 @@
       </p:sp>
       <p:sp>
         <p:nvSpPr>
-          <p:cNvPr id="235" name="Text 233"/>
+          <p:cNvPr id="230" name="Text 228"/>
           <p:cNvSpPr/>
           <p:nvPr/>
         </p:nvSpPr>
@@ -9076,7 +8961,7 @@
       </p:sp>
       <p:sp>
         <p:nvSpPr>
-          <p:cNvPr id="236" name="Text 234"/>
+          <p:cNvPr id="231" name="Text 229"/>
           <p:cNvSpPr/>
           <p:nvPr/>
         </p:nvSpPr>
@@ -9118,7 +9003,7 @@
       </p:sp>
       <p:sp>
         <p:nvSpPr>
-          <p:cNvPr id="237" name="Text 235"/>
+          <p:cNvPr id="232" name="Text 230"/>
           <p:cNvSpPr/>
           <p:nvPr/>
         </p:nvSpPr>
@@ -9160,7 +9045,7 @@
       </p:sp>
       <p:sp>
         <p:nvSpPr>
-          <p:cNvPr id="238" name="Text 236"/>
+          <p:cNvPr id="233" name="Text 231"/>
           <p:cNvSpPr/>
           <p:nvPr/>
         </p:nvSpPr>
@@ -9202,7 +9087,7 @@
       </p:sp>
       <p:sp>
         <p:nvSpPr>
-          <p:cNvPr id="239" name="Text 237"/>
+          <p:cNvPr id="234" name="Text 232"/>
           <p:cNvSpPr/>
           <p:nvPr/>
         </p:nvSpPr>
@@ -9244,7 +9129,7 @@
       </p:sp>
       <p:sp>
         <p:nvSpPr>
-          <p:cNvPr id="240" name="Text 238"/>
+          <p:cNvPr id="235" name="Text 233"/>
           <p:cNvSpPr/>
           <p:nvPr/>
         </p:nvSpPr>
@@ -9286,7 +9171,7 @@
       </p:sp>
       <p:sp>
         <p:nvSpPr>
-          <p:cNvPr id="241" name="Text 239"/>
+          <p:cNvPr id="236" name="Text 234"/>
           <p:cNvSpPr/>
           <p:nvPr/>
         </p:nvSpPr>
@@ -9328,7 +9213,7 @@
       </p:sp>
       <p:sp>
         <p:nvSpPr>
-          <p:cNvPr id="242" name="Text 240"/>
+          <p:cNvPr id="237" name="Text 235"/>
           <p:cNvSpPr/>
           <p:nvPr/>
         </p:nvSpPr>
@@ -9370,7 +9255,7 @@
       </p:sp>
       <p:sp>
         <p:nvSpPr>
-          <p:cNvPr id="243" name="Text 241"/>
+          <p:cNvPr id="238" name="Text 236"/>
           <p:cNvSpPr/>
           <p:nvPr/>
         </p:nvSpPr>
@@ -9412,7 +9297,7 @@
       </p:sp>
       <p:sp>
         <p:nvSpPr>
-          <p:cNvPr id="244" name="Text 242"/>
+          <p:cNvPr id="239" name="Text 237"/>
           <p:cNvSpPr/>
           <p:nvPr/>
         </p:nvSpPr>
@@ -9454,7 +9339,7 @@
       </p:sp>
       <p:sp>
         <p:nvSpPr>
-          <p:cNvPr id="245" name="Shape 243"/>
+          <p:cNvPr id="240" name="Shape 238"/>
           <p:cNvSpPr/>
           <p:nvPr/>
         </p:nvSpPr>
@@ -9476,7 +9361,7 @@
       </p:sp>
       <p:sp>
         <p:nvSpPr>
-          <p:cNvPr id="246" name="Text 244"/>
+          <p:cNvPr id="241" name="Text 239"/>
           <p:cNvSpPr/>
           <p:nvPr/>
         </p:nvSpPr>
@@ -9535,7 +9420,7 @@
       </p:sp>
       <p:sp>
         <p:nvSpPr>
-          <p:cNvPr id="247" name="Text 245"/>
+          <p:cNvPr id="242" name="Text 240"/>
           <p:cNvSpPr/>
           <p:nvPr/>
         </p:nvSpPr>
@@ -9577,7 +9462,7 @@
       </p:sp>
       <p:sp>
         <p:nvSpPr>
-          <p:cNvPr id="248" name="Text 246"/>
+          <p:cNvPr id="243" name="Text 241"/>
           <p:cNvSpPr/>
           <p:nvPr/>
         </p:nvSpPr>
@@ -9651,7 +9536,7 @@
                 <a:ea typeface="Arial" pitchFamily="34" charset="-122"/>
                 <a:cs typeface="Arial" pitchFamily="34" charset="-120"/>
               </a:rPr>
-              <a:t>0.98</a:t>
+              <a:t>0.99</a:t>
             </a:r>
             <a:endParaRPr lang="en-US" sz="700" dirty="0"/>
           </a:p>
@@ -9659,7 +9544,7 @@
       </p:sp>
       <p:sp>
         <p:nvSpPr>
-          <p:cNvPr id="249" name="Text 247"/>
+          <p:cNvPr id="244" name="Text 242"/>
           <p:cNvSpPr/>
           <p:nvPr/>
         </p:nvSpPr>
@@ -9701,7 +9586,7 @@
       </p:sp>
       <p:sp>
         <p:nvSpPr>
-          <p:cNvPr id="250" name="Text 248"/>
+          <p:cNvPr id="245" name="Text 243"/>
           <p:cNvSpPr/>
           <p:nvPr/>
         </p:nvSpPr>
@@ -9777,7 +9662,7 @@
       </p:sp>
       <p:sp>
         <p:nvSpPr>
-          <p:cNvPr id="251" name="Shape 249"/>
+          <p:cNvPr id="246" name="Shape 244"/>
           <p:cNvSpPr/>
           <p:nvPr/>
         </p:nvSpPr>
@@ -9799,7 +9684,7 @@
       </p:sp>
       <p:sp>
         <p:nvSpPr>
-          <p:cNvPr id="252" name="Shape 250"/>
+          <p:cNvPr id="247" name="Shape 245"/>
           <p:cNvSpPr/>
           <p:nvPr/>
         </p:nvSpPr>
@@ -9821,7 +9706,7 @@
       </p:sp>
       <p:sp>
         <p:nvSpPr>
-          <p:cNvPr id="253" name="Shape 251"/>
+          <p:cNvPr id="248" name="Shape 246"/>
           <p:cNvSpPr/>
           <p:nvPr/>
         </p:nvSpPr>
@@ -9844,7 +9729,7 @@
       </p:sp>
       <p:sp>
         <p:nvSpPr>
-          <p:cNvPr id="254" name="Shape 252"/>
+          <p:cNvPr id="249" name="Shape 247"/>
           <p:cNvSpPr/>
           <p:nvPr/>
         </p:nvSpPr>
@@ -9867,7 +9752,7 @@
       </p:sp>
       <p:sp>
         <p:nvSpPr>
-          <p:cNvPr id="255" name="Shape 253"/>
+          <p:cNvPr id="250" name="Shape 248"/>
           <p:cNvSpPr/>
           <p:nvPr/>
         </p:nvSpPr>
@@ -9890,7 +9775,7 @@
       </p:sp>
       <p:sp>
         <p:nvSpPr>
-          <p:cNvPr id="256" name="Shape 254"/>
+          <p:cNvPr id="251" name="Shape 249"/>
           <p:cNvSpPr/>
           <p:nvPr/>
         </p:nvSpPr>
@@ -9913,7 +9798,7 @@
       </p:sp>
       <p:sp>
         <p:nvSpPr>
-          <p:cNvPr id="257" name="Text 255"/>
+          <p:cNvPr id="252" name="Text 250"/>
           <p:cNvSpPr/>
           <p:nvPr/>
         </p:nvSpPr>
@@ -9955,7 +9840,7 @@
       </p:sp>
       <p:sp>
         <p:nvSpPr>
-          <p:cNvPr id="258" name="Text 256"/>
+          <p:cNvPr id="253" name="Text 251"/>
           <p:cNvSpPr/>
           <p:nvPr/>
         </p:nvSpPr>
@@ -9997,7 +9882,7 @@
       </p:sp>
       <p:sp>
         <p:nvSpPr>
-          <p:cNvPr id="259" name="Text 257"/>
+          <p:cNvPr id="254" name="Text 252"/>
           <p:cNvSpPr/>
           <p:nvPr/>
         </p:nvSpPr>
@@ -10039,7 +9924,7 @@
       </p:sp>
       <p:sp>
         <p:nvSpPr>
-          <p:cNvPr id="260" name="Text 258"/>
+          <p:cNvPr id="255" name="Text 253"/>
           <p:cNvSpPr/>
           <p:nvPr/>
         </p:nvSpPr>
@@ -10081,7 +9966,7 @@
       </p:sp>
       <p:sp>
         <p:nvSpPr>
-          <p:cNvPr id="261" name="Text 259"/>
+          <p:cNvPr id="256" name="Text 254"/>
           <p:cNvSpPr/>
           <p:nvPr/>
         </p:nvSpPr>
@@ -10123,7 +10008,7 @@
       </p:sp>
       <p:sp>
         <p:nvSpPr>
-          <p:cNvPr id="262" name="Text 260"/>
+          <p:cNvPr id="257" name="Text 255"/>
           <p:cNvSpPr/>
           <p:nvPr/>
         </p:nvSpPr>
@@ -10165,7 +10050,7 @@
       </p:sp>
       <p:sp>
         <p:nvSpPr>
-          <p:cNvPr id="263" name="Text 261"/>
+          <p:cNvPr id="258" name="Text 256"/>
           <p:cNvSpPr/>
           <p:nvPr/>
         </p:nvSpPr>
@@ -10207,7 +10092,7 @@
       </p:sp>
       <p:sp>
         <p:nvSpPr>
-          <p:cNvPr id="264" name="Text 262"/>
+          <p:cNvPr id="259" name="Text 257"/>
           <p:cNvSpPr/>
           <p:nvPr/>
         </p:nvSpPr>
@@ -10249,7 +10134,7 @@
       </p:sp>
       <p:sp>
         <p:nvSpPr>
-          <p:cNvPr id="265" name="Text 263"/>
+          <p:cNvPr id="260" name="Text 258"/>
           <p:cNvSpPr/>
           <p:nvPr/>
         </p:nvSpPr>
@@ -10291,7 +10176,7 @@
       </p:sp>
       <p:sp>
         <p:nvSpPr>
-          <p:cNvPr id="266" name="Text 264"/>
+          <p:cNvPr id="261" name="Text 259"/>
           <p:cNvSpPr/>
           <p:nvPr/>
         </p:nvSpPr>
@@ -10333,7 +10218,7 @@
       </p:sp>
       <p:sp>
         <p:nvSpPr>
-          <p:cNvPr id="267" name="Text 265"/>
+          <p:cNvPr id="262" name="Text 260"/>
           <p:cNvSpPr/>
           <p:nvPr/>
         </p:nvSpPr>
@@ -10375,7 +10260,7 @@
       </p:sp>
       <p:sp>
         <p:nvSpPr>
-          <p:cNvPr id="268" name="Text 266"/>
+          <p:cNvPr id="263" name="Text 261"/>
           <p:cNvSpPr/>
           <p:nvPr/>
         </p:nvSpPr>
@@ -10417,7 +10302,7 @@
       </p:sp>
       <p:sp>
         <p:nvSpPr>
-          <p:cNvPr id="269" name="Text 267"/>
+          <p:cNvPr id="264" name="Text 262"/>
           <p:cNvSpPr/>
           <p:nvPr/>
         </p:nvSpPr>
@@ -10459,7 +10344,7 @@
       </p:sp>
       <p:sp>
         <p:nvSpPr>
-          <p:cNvPr id="270" name="Text 268"/>
+          <p:cNvPr id="265" name="Text 263"/>
           <p:cNvSpPr/>
           <p:nvPr/>
         </p:nvSpPr>
@@ -10501,7 +10386,7 @@
       </p:sp>
       <p:sp>
         <p:nvSpPr>
-          <p:cNvPr id="271" name="Text 269"/>
+          <p:cNvPr id="266" name="Text 264"/>
           <p:cNvSpPr/>
           <p:nvPr/>
         </p:nvSpPr>
@@ -10543,7 +10428,7 @@
       </p:sp>
       <p:sp>
         <p:nvSpPr>
-          <p:cNvPr id="272" name="Shape 270"/>
+          <p:cNvPr id="267" name="Shape 265"/>
           <p:cNvSpPr/>
           <p:nvPr/>
         </p:nvSpPr>
@@ -10563,13 +10448,13 @@
       </p:sp>
       <p:sp>
         <p:nvSpPr>
-          <p:cNvPr id="273" name="Text 271"/>
-          <p:cNvSpPr/>
-          <p:nvPr/>
-        </p:nvSpPr>
-        <p:spPr>
-          <a:xfrm>
-            <a:off x="8178800" y="2298700"/>
+          <p:cNvPr id="268" name="Text 266"/>
+          <p:cNvSpPr/>
+          <p:nvPr/>
+        </p:nvSpPr>
+        <p:spPr>
+          <a:xfrm>
+            <a:off x="8382000" y="2247900"/>
             <a:ext cx="3251200" cy="381000"/>
           </a:xfrm>
           <a:prstGeom prst="rect">
@@ -10584,12 +10469,12 @@
           <a:p>
             <a:pPr algn="l" indent="0" marL="0">
               <a:lnSpc>
-                <a:spcPts val="1440"/>
-              </a:lnSpc>
-              <a:buNone/>
-            </a:pPr>
-            <a:r>
-              <a:rPr lang="en-US" sz="1200" b="1" dirty="0">
+                <a:spcPts val="1920"/>
+              </a:lnSpc>
+              <a:buNone/>
+            </a:pPr>
+            <a:r>
+              <a:rPr lang="en-US" sz="1600" b="1" dirty="0">
                 <a:solidFill>
                   <a:srgbClr val="0000FF"/>
                 </a:solidFill>
@@ -10601,12 +10486,12 @@
             </a:r>
             <a:pPr algn="l" indent="0" marL="0">
               <a:lnSpc>
-                <a:spcPts val="1440"/>
-              </a:lnSpc>
-              <a:buNone/>
-            </a:pPr>
-            <a:r>
-              <a:rPr lang="en-US" sz="1200" b="1" dirty="0">
+                <a:spcPts val="1920"/>
+              </a:lnSpc>
+              <a:buNone/>
+            </a:pPr>
+            <a:r>
+              <a:rPr lang="en-US" sz="1600" b="1" dirty="0">
                 <a:solidFill>
                   <a:srgbClr val="FF0000"/>
                 </a:solidFill>
@@ -10616,13 +10501,13 @@
               </a:rPr>
               <a:t>λ=10</a:t>
             </a:r>
-            <a:endParaRPr lang="en-US" sz="1200" dirty="0"/>
-          </a:p>
-        </p:txBody>
-      </p:sp>
-      <p:sp>
-        <p:nvSpPr>
-          <p:cNvPr id="274" name="Shape 272"/>
+            <a:endParaRPr lang="en-US" sz="1600" dirty="0"/>
+          </a:p>
+        </p:txBody>
+      </p:sp>
+      <p:sp>
+        <p:nvSpPr>
+          <p:cNvPr id="269" name="Shape 267"/>
           <p:cNvSpPr/>
           <p:nvPr/>
         </p:nvSpPr>
@@ -10644,7 +10529,7 @@
       </p:sp>
       <p:sp>
         <p:nvSpPr>
-          <p:cNvPr id="275" name="Text 273"/>
+          <p:cNvPr id="270" name="Text 268"/>
           <p:cNvSpPr/>
           <p:nvPr/>
         </p:nvSpPr>
@@ -10703,7 +10588,7 @@
       </p:sp>
       <p:sp>
         <p:nvSpPr>
-          <p:cNvPr id="276" name="Text 274"/>
+          <p:cNvPr id="271" name="Text 269"/>
           <p:cNvSpPr/>
           <p:nvPr/>
         </p:nvSpPr>
@@ -10745,7 +10630,7 @@
       </p:sp>
       <p:sp>
         <p:nvSpPr>
-          <p:cNvPr id="277" name="Text 275"/>
+          <p:cNvPr id="272" name="Text 270"/>
           <p:cNvSpPr/>
           <p:nvPr/>
         </p:nvSpPr>
@@ -10827,7 +10712,7 @@
       </p:sp>
       <p:sp>
         <p:nvSpPr>
-          <p:cNvPr id="278" name="Text 276"/>
+          <p:cNvPr id="273" name="Text 271"/>
           <p:cNvSpPr/>
           <p:nvPr/>
         </p:nvSpPr>
@@ -10869,7 +10754,7 @@
       </p:sp>
       <p:sp>
         <p:nvSpPr>
-          <p:cNvPr id="279" name="Text 277"/>
+          <p:cNvPr id="274" name="Text 272"/>
           <p:cNvSpPr/>
           <p:nvPr/>
         </p:nvSpPr>
@@ -10945,7 +10830,7 @@
       </p:sp>
       <p:sp>
         <p:nvSpPr>
-          <p:cNvPr id="280" name="Shape 278"/>
+          <p:cNvPr id="275" name="Shape 273"/>
           <p:cNvSpPr/>
           <p:nvPr/>
         </p:nvSpPr>
@@ -10967,7 +10852,7 @@
       </p:sp>
       <p:sp>
         <p:nvSpPr>
-          <p:cNvPr id="281" name="Shape 279"/>
+          <p:cNvPr id="276" name="Shape 274"/>
           <p:cNvSpPr/>
           <p:nvPr/>
         </p:nvSpPr>
@@ -10989,7 +10874,7 @@
       </p:sp>
       <p:sp>
         <p:nvSpPr>
-          <p:cNvPr id="282" name="Shape 280"/>
+          <p:cNvPr id="277" name="Shape 275"/>
           <p:cNvSpPr/>
           <p:nvPr/>
         </p:nvSpPr>
@@ -11012,7 +10897,7 @@
       </p:sp>
       <p:sp>
         <p:nvSpPr>
-          <p:cNvPr id="283" name="Shape 281"/>
+          <p:cNvPr id="278" name="Shape 276"/>
           <p:cNvSpPr/>
           <p:nvPr/>
         </p:nvSpPr>
@@ -11035,7 +10920,7 @@
       </p:sp>
       <p:sp>
         <p:nvSpPr>
-          <p:cNvPr id="284" name="Shape 282"/>
+          <p:cNvPr id="279" name="Shape 277"/>
           <p:cNvSpPr/>
           <p:nvPr/>
         </p:nvSpPr>
@@ -11058,7 +10943,7 @@
       </p:sp>
       <p:sp>
         <p:nvSpPr>
-          <p:cNvPr id="285" name="Shape 283"/>
+          <p:cNvPr id="280" name="Shape 278"/>
           <p:cNvSpPr/>
           <p:nvPr/>
         </p:nvSpPr>
@@ -11081,7 +10966,7 @@
       </p:sp>
       <p:sp>
         <p:nvSpPr>
-          <p:cNvPr id="286" name="Text 284"/>
+          <p:cNvPr id="281" name="Text 279"/>
           <p:cNvSpPr/>
           <p:nvPr/>
         </p:nvSpPr>
@@ -11123,7 +11008,7 @@
       </p:sp>
       <p:sp>
         <p:nvSpPr>
-          <p:cNvPr id="287" name="Text 285"/>
+          <p:cNvPr id="282" name="Text 280"/>
           <p:cNvSpPr/>
           <p:nvPr/>
         </p:nvSpPr>
@@ -11165,7 +11050,7 @@
       </p:sp>
       <p:sp>
         <p:nvSpPr>
-          <p:cNvPr id="288" name="Text 286"/>
+          <p:cNvPr id="283" name="Text 281"/>
           <p:cNvSpPr/>
           <p:nvPr/>
         </p:nvSpPr>
@@ -11207,7 +11092,7 @@
       </p:sp>
       <p:sp>
         <p:nvSpPr>
-          <p:cNvPr id="289" name="Text 287"/>
+          <p:cNvPr id="284" name="Text 282"/>
           <p:cNvSpPr/>
           <p:nvPr/>
         </p:nvSpPr>
@@ -11249,7 +11134,7 @@
       </p:sp>
       <p:sp>
         <p:nvSpPr>
-          <p:cNvPr id="290" name="Text 288"/>
+          <p:cNvPr id="285" name="Text 283"/>
           <p:cNvSpPr/>
           <p:nvPr/>
         </p:nvSpPr>
@@ -11291,7 +11176,7 @@
       </p:sp>
       <p:sp>
         <p:nvSpPr>
-          <p:cNvPr id="291" name="Text 289"/>
+          <p:cNvPr id="286" name="Text 284"/>
           <p:cNvSpPr/>
           <p:nvPr/>
         </p:nvSpPr>
@@ -11333,7 +11218,7 @@
       </p:sp>
       <p:sp>
         <p:nvSpPr>
-          <p:cNvPr id="292" name="Text 290"/>
+          <p:cNvPr id="287" name="Text 285"/>
           <p:cNvSpPr/>
           <p:nvPr/>
         </p:nvSpPr>
@@ -11375,7 +11260,7 @@
       </p:sp>
       <p:sp>
         <p:nvSpPr>
-          <p:cNvPr id="293" name="Text 291"/>
+          <p:cNvPr id="288" name="Text 286"/>
           <p:cNvSpPr/>
           <p:nvPr/>
         </p:nvSpPr>
@@ -11417,7 +11302,7 @@
       </p:sp>
       <p:sp>
         <p:nvSpPr>
-          <p:cNvPr id="294" name="Text 292"/>
+          <p:cNvPr id="289" name="Text 287"/>
           <p:cNvSpPr/>
           <p:nvPr/>
         </p:nvSpPr>
@@ -11459,7 +11344,7 @@
       </p:sp>
       <p:sp>
         <p:nvSpPr>
-          <p:cNvPr id="295" name="Text 293"/>
+          <p:cNvPr id="290" name="Text 288"/>
           <p:cNvSpPr/>
           <p:nvPr/>
         </p:nvSpPr>
@@ -11501,7 +11386,7 @@
       </p:sp>
       <p:sp>
         <p:nvSpPr>
-          <p:cNvPr id="296" name="Text 294"/>
+          <p:cNvPr id="291" name="Text 289"/>
           <p:cNvSpPr/>
           <p:nvPr/>
         </p:nvSpPr>
@@ -11543,7 +11428,7 @@
       </p:sp>
       <p:sp>
         <p:nvSpPr>
-          <p:cNvPr id="297" name="Text 295"/>
+          <p:cNvPr id="292" name="Text 290"/>
           <p:cNvSpPr/>
           <p:nvPr/>
         </p:nvSpPr>
@@ -11585,7 +11470,7 @@
       </p:sp>
       <p:sp>
         <p:nvSpPr>
-          <p:cNvPr id="298" name="Text 296"/>
+          <p:cNvPr id="293" name="Text 291"/>
           <p:cNvSpPr/>
           <p:nvPr/>
         </p:nvSpPr>
@@ -11627,7 +11512,7 @@
       </p:sp>
       <p:sp>
         <p:nvSpPr>
-          <p:cNvPr id="299" name="Text 297"/>
+          <p:cNvPr id="294" name="Text 292"/>
           <p:cNvSpPr/>
           <p:nvPr/>
         </p:nvSpPr>
@@ -11669,7 +11554,7 @@
       </p:sp>
       <p:sp>
         <p:nvSpPr>
-          <p:cNvPr id="300" name="Text 298"/>
+          <p:cNvPr id="295" name="Text 293"/>
           <p:cNvSpPr/>
           <p:nvPr/>
         </p:nvSpPr>
@@ -11711,7 +11596,7 @@
       </p:sp>
       <p:sp>
         <p:nvSpPr>
-          <p:cNvPr id="301" name="Shape 299"/>
+          <p:cNvPr id="296" name="Shape 294"/>
           <p:cNvSpPr/>
           <p:nvPr/>
         </p:nvSpPr>
@@ -11733,7 +11618,7 @@
       </p:sp>
       <p:sp>
         <p:nvSpPr>
-          <p:cNvPr id="302" name="Text 300"/>
+          <p:cNvPr id="297" name="Text 295"/>
           <p:cNvSpPr/>
           <p:nvPr/>
         </p:nvSpPr>
@@ -11792,7 +11677,7 @@
       </p:sp>
       <p:sp>
         <p:nvSpPr>
-          <p:cNvPr id="303" name="Text 301"/>
+          <p:cNvPr id="298" name="Text 296"/>
           <p:cNvSpPr/>
           <p:nvPr/>
         </p:nvSpPr>
@@ -11834,7 +11719,7 @@
       </p:sp>
       <p:sp>
         <p:nvSpPr>
-          <p:cNvPr id="304" name="Text 302"/>
+          <p:cNvPr id="299" name="Text 297"/>
           <p:cNvSpPr/>
           <p:nvPr/>
         </p:nvSpPr>
@@ -11916,7 +11801,7 @@
       </p:sp>
       <p:sp>
         <p:nvSpPr>
-          <p:cNvPr id="305" name="Text 303"/>
+          <p:cNvPr id="300" name="Text 298"/>
           <p:cNvSpPr/>
           <p:nvPr/>
         </p:nvSpPr>
@@ -11958,7 +11843,7 @@
       </p:sp>
       <p:sp>
         <p:nvSpPr>
-          <p:cNvPr id="306" name="Text 304"/>
+          <p:cNvPr id="301" name="Text 299"/>
           <p:cNvSpPr/>
           <p:nvPr/>
         </p:nvSpPr>
@@ -12034,7 +11919,7 @@
       </p:sp>
       <p:sp>
         <p:nvSpPr>
-          <p:cNvPr id="307" name="Shape 305"/>
+          <p:cNvPr id="302" name="Shape 300"/>
           <p:cNvSpPr/>
           <p:nvPr/>
         </p:nvSpPr>
@@ -12056,7 +11941,7 @@
       </p:sp>
       <p:sp>
         <p:nvSpPr>
-          <p:cNvPr id="308" name="Shape 306"/>
+          <p:cNvPr id="303" name="Shape 301"/>
           <p:cNvSpPr/>
           <p:nvPr/>
         </p:nvSpPr>
@@ -12078,7 +11963,7 @@
       </p:sp>
       <p:sp>
         <p:nvSpPr>
-          <p:cNvPr id="309" name="Shape 307"/>
+          <p:cNvPr id="304" name="Shape 302"/>
           <p:cNvSpPr/>
           <p:nvPr/>
         </p:nvSpPr>
@@ -12101,7 +11986,7 @@
       </p:sp>
       <p:sp>
         <p:nvSpPr>
-          <p:cNvPr id="310" name="Shape 308"/>
+          <p:cNvPr id="305" name="Shape 303"/>
           <p:cNvSpPr/>
           <p:nvPr/>
         </p:nvSpPr>
@@ -12124,7 +12009,7 @@
       </p:sp>
       <p:sp>
         <p:nvSpPr>
-          <p:cNvPr id="311" name="Shape 309"/>
+          <p:cNvPr id="306" name="Shape 304"/>
           <p:cNvSpPr/>
           <p:nvPr/>
         </p:nvSpPr>
@@ -12147,7 +12032,7 @@
       </p:sp>
       <p:sp>
         <p:nvSpPr>
-          <p:cNvPr id="312" name="Shape 310"/>
+          <p:cNvPr id="307" name="Shape 305"/>
           <p:cNvSpPr/>
           <p:nvPr/>
         </p:nvSpPr>
@@ -12170,7 +12055,7 @@
       </p:sp>
       <p:sp>
         <p:nvSpPr>
-          <p:cNvPr id="313" name="Text 311"/>
+          <p:cNvPr id="308" name="Text 306"/>
           <p:cNvSpPr/>
           <p:nvPr/>
         </p:nvSpPr>
@@ -12212,7 +12097,7 @@
       </p:sp>
       <p:sp>
         <p:nvSpPr>
-          <p:cNvPr id="314" name="Text 312"/>
+          <p:cNvPr id="309" name="Text 307"/>
           <p:cNvSpPr/>
           <p:nvPr/>
         </p:nvSpPr>
@@ -12254,7 +12139,7 @@
       </p:sp>
       <p:sp>
         <p:nvSpPr>
-          <p:cNvPr id="315" name="Text 313"/>
+          <p:cNvPr id="310" name="Text 308"/>
           <p:cNvSpPr/>
           <p:nvPr/>
         </p:nvSpPr>
@@ -12296,7 +12181,7 @@
       </p:sp>
       <p:sp>
         <p:nvSpPr>
-          <p:cNvPr id="316" name="Text 314"/>
+          <p:cNvPr id="311" name="Text 309"/>
           <p:cNvSpPr/>
           <p:nvPr/>
         </p:nvSpPr>
@@ -12338,7 +12223,7 @@
       </p:sp>
       <p:sp>
         <p:nvSpPr>
-          <p:cNvPr id="317" name="Text 315"/>
+          <p:cNvPr id="312" name="Text 310"/>
           <p:cNvSpPr/>
           <p:nvPr/>
         </p:nvSpPr>
@@ -12380,7 +12265,7 @@
       </p:sp>
       <p:sp>
         <p:nvSpPr>
-          <p:cNvPr id="318" name="Text 316"/>
+          <p:cNvPr id="313" name="Text 311"/>
           <p:cNvSpPr/>
           <p:nvPr/>
         </p:nvSpPr>
@@ -12422,7 +12307,7 @@
       </p:sp>
       <p:sp>
         <p:nvSpPr>
-          <p:cNvPr id="319" name="Text 317"/>
+          <p:cNvPr id="314" name="Text 312"/>
           <p:cNvSpPr/>
           <p:nvPr/>
         </p:nvSpPr>
@@ -12464,7 +12349,7 @@
       </p:sp>
       <p:sp>
         <p:nvSpPr>
-          <p:cNvPr id="320" name="Text 318"/>
+          <p:cNvPr id="315" name="Text 313"/>
           <p:cNvSpPr/>
           <p:nvPr/>
         </p:nvSpPr>
@@ -12506,7 +12391,7 @@
       </p:sp>
       <p:sp>
         <p:nvSpPr>
-          <p:cNvPr id="321" name="Text 319"/>
+          <p:cNvPr id="316" name="Text 314"/>
           <p:cNvSpPr/>
           <p:nvPr/>
         </p:nvSpPr>
@@ -12548,7 +12433,7 @@
       </p:sp>
       <p:sp>
         <p:nvSpPr>
-          <p:cNvPr id="322" name="Text 320"/>
+          <p:cNvPr id="317" name="Text 315"/>
           <p:cNvSpPr/>
           <p:nvPr/>
         </p:nvSpPr>
@@ -12590,7 +12475,7 @@
       </p:sp>
       <p:sp>
         <p:nvSpPr>
-          <p:cNvPr id="323" name="Text 321"/>
+          <p:cNvPr id="318" name="Text 316"/>
           <p:cNvSpPr/>
           <p:nvPr/>
         </p:nvSpPr>
@@ -12632,7 +12517,7 @@
       </p:sp>
       <p:sp>
         <p:nvSpPr>
-          <p:cNvPr id="324" name="Text 322"/>
+          <p:cNvPr id="319" name="Text 317"/>
           <p:cNvSpPr/>
           <p:nvPr/>
         </p:nvSpPr>
@@ -12674,7 +12559,7 @@
       </p:sp>
       <p:sp>
         <p:nvSpPr>
-          <p:cNvPr id="325" name="Text 323"/>
+          <p:cNvPr id="320" name="Text 318"/>
           <p:cNvSpPr/>
           <p:nvPr/>
         </p:nvSpPr>
@@ -12716,7 +12601,7 @@
       </p:sp>
       <p:sp>
         <p:nvSpPr>
-          <p:cNvPr id="326" name="Text 324"/>
+          <p:cNvPr id="321" name="Text 319"/>
           <p:cNvSpPr/>
           <p:nvPr/>
         </p:nvSpPr>
@@ -12758,7 +12643,7 @@
       </p:sp>
       <p:sp>
         <p:nvSpPr>
-          <p:cNvPr id="327" name="Text 325"/>
+          <p:cNvPr id="322" name="Text 320"/>
           <p:cNvSpPr/>
           <p:nvPr/>
         </p:nvSpPr>
@@ -12800,7 +12685,7 @@
       </p:sp>
       <p:sp>
         <p:nvSpPr>
-          <p:cNvPr id="328" name="Shape 326"/>
+          <p:cNvPr id="323" name="Shape 321"/>
           <p:cNvSpPr/>
           <p:nvPr/>
         </p:nvSpPr>
@@ -12822,7 +12707,7 @@
       </p:sp>
       <p:sp>
         <p:nvSpPr>
-          <p:cNvPr id="329" name="Text 327"/>
+          <p:cNvPr id="324" name="Text 322"/>
           <p:cNvSpPr/>
           <p:nvPr/>
         </p:nvSpPr>
@@ -12881,7 +12766,7 @@
       </p:sp>
       <p:sp>
         <p:nvSpPr>
-          <p:cNvPr id="330" name="Text 328"/>
+          <p:cNvPr id="325" name="Text 323"/>
           <p:cNvSpPr/>
           <p:nvPr/>
         </p:nvSpPr>
@@ -12923,7 +12808,7 @@
       </p:sp>
       <p:sp>
         <p:nvSpPr>
-          <p:cNvPr id="331" name="Text 329"/>
+          <p:cNvPr id="326" name="Text 324"/>
           <p:cNvSpPr/>
           <p:nvPr/>
         </p:nvSpPr>
@@ -13005,7 +12890,7 @@
       </p:sp>
       <p:sp>
         <p:nvSpPr>
-          <p:cNvPr id="332" name="Text 330"/>
+          <p:cNvPr id="327" name="Text 325"/>
           <p:cNvSpPr/>
           <p:nvPr/>
         </p:nvSpPr>
@@ -13047,7 +12932,7 @@
       </p:sp>
       <p:sp>
         <p:nvSpPr>
-          <p:cNvPr id="333" name="Text 331"/>
+          <p:cNvPr id="328" name="Text 326"/>
           <p:cNvSpPr/>
           <p:nvPr/>
         </p:nvSpPr>
@@ -13123,7 +13008,7 @@
       </p:sp>
       <p:sp>
         <p:nvSpPr>
-          <p:cNvPr id="334" name="Shape 332"/>
+          <p:cNvPr id="329" name="Shape 327"/>
           <p:cNvSpPr/>
           <p:nvPr/>
         </p:nvSpPr>
@@ -13145,7 +13030,7 @@
       </p:sp>
       <p:sp>
         <p:nvSpPr>
-          <p:cNvPr id="335" name="Shape 333"/>
+          <p:cNvPr id="330" name="Shape 328"/>
           <p:cNvSpPr/>
           <p:nvPr/>
         </p:nvSpPr>
@@ -13167,7 +13052,7 @@
       </p:sp>
       <p:sp>
         <p:nvSpPr>
-          <p:cNvPr id="336" name="Shape 334"/>
+          <p:cNvPr id="331" name="Shape 329"/>
           <p:cNvSpPr/>
           <p:nvPr/>
         </p:nvSpPr>
@@ -13190,7 +13075,7 @@
       </p:sp>
       <p:sp>
         <p:nvSpPr>
-          <p:cNvPr id="337" name="Shape 335"/>
+          <p:cNvPr id="332" name="Shape 330"/>
           <p:cNvSpPr/>
           <p:nvPr/>
         </p:nvSpPr>
@@ -13213,7 +13098,7 @@
       </p:sp>
       <p:sp>
         <p:nvSpPr>
-          <p:cNvPr id="338" name="Shape 336"/>
+          <p:cNvPr id="333" name="Shape 331"/>
           <p:cNvSpPr/>
           <p:nvPr/>
         </p:nvSpPr>
@@ -13236,7 +13121,7 @@
       </p:sp>
       <p:sp>
         <p:nvSpPr>
-          <p:cNvPr id="339" name="Shape 337"/>
+          <p:cNvPr id="334" name="Shape 332"/>
           <p:cNvSpPr/>
           <p:nvPr/>
         </p:nvSpPr>
@@ -13259,7 +13144,7 @@
       </p:sp>
       <p:sp>
         <p:nvSpPr>
-          <p:cNvPr id="340" name="Text 338"/>
+          <p:cNvPr id="335" name="Text 333"/>
           <p:cNvSpPr/>
           <p:nvPr/>
         </p:nvSpPr>
@@ -13301,7 +13186,7 @@
       </p:sp>
       <p:sp>
         <p:nvSpPr>
-          <p:cNvPr id="341" name="Text 339"/>
+          <p:cNvPr id="336" name="Text 334"/>
           <p:cNvSpPr/>
           <p:nvPr/>
         </p:nvSpPr>
@@ -13343,7 +13228,7 @@
       </p:sp>
       <p:sp>
         <p:nvSpPr>
-          <p:cNvPr id="342" name="Text 340"/>
+          <p:cNvPr id="337" name="Text 335"/>
           <p:cNvSpPr/>
           <p:nvPr/>
         </p:nvSpPr>
@@ -13385,7 +13270,7 @@
       </p:sp>
       <p:sp>
         <p:nvSpPr>
-          <p:cNvPr id="343" name="Text 341"/>
+          <p:cNvPr id="338" name="Text 336"/>
           <p:cNvSpPr/>
           <p:nvPr/>
         </p:nvSpPr>
@@ -13427,7 +13312,7 @@
       </p:sp>
       <p:sp>
         <p:nvSpPr>
-          <p:cNvPr id="344" name="Text 342"/>
+          <p:cNvPr id="339" name="Text 337"/>
           <p:cNvSpPr/>
           <p:nvPr/>
         </p:nvSpPr>
@@ -13469,7 +13354,7 @@
       </p:sp>
       <p:sp>
         <p:nvSpPr>
-          <p:cNvPr id="345" name="Text 343"/>
+          <p:cNvPr id="340" name="Text 338"/>
           <p:cNvSpPr/>
           <p:nvPr/>
         </p:nvSpPr>
@@ -13511,7 +13396,7 @@
       </p:sp>
       <p:sp>
         <p:nvSpPr>
-          <p:cNvPr id="346" name="Text 344"/>
+          <p:cNvPr id="341" name="Text 339"/>
           <p:cNvSpPr/>
           <p:nvPr/>
         </p:nvSpPr>
@@ -13553,7 +13438,7 @@
       </p:sp>
       <p:sp>
         <p:nvSpPr>
-          <p:cNvPr id="347" name="Text 345"/>
+          <p:cNvPr id="342" name="Text 340"/>
           <p:cNvSpPr/>
           <p:nvPr/>
         </p:nvSpPr>
@@ -13595,7 +13480,7 @@
       </p:sp>
       <p:sp>
         <p:nvSpPr>
-          <p:cNvPr id="348" name="Text 346"/>
+          <p:cNvPr id="343" name="Text 341"/>
           <p:cNvSpPr/>
           <p:nvPr/>
         </p:nvSpPr>
@@ -13637,7 +13522,7 @@
       </p:sp>
       <p:sp>
         <p:nvSpPr>
-          <p:cNvPr id="349" name="Text 347"/>
+          <p:cNvPr id="344" name="Text 342"/>
           <p:cNvSpPr/>
           <p:nvPr/>
         </p:nvSpPr>
@@ -13679,7 +13564,7 @@
       </p:sp>
       <p:sp>
         <p:nvSpPr>
-          <p:cNvPr id="350" name="Text 348"/>
+          <p:cNvPr id="345" name="Text 343"/>
           <p:cNvSpPr/>
           <p:nvPr/>
         </p:nvSpPr>
@@ -13721,7 +13606,7 @@
       </p:sp>
       <p:sp>
         <p:nvSpPr>
-          <p:cNvPr id="351" name="Text 349"/>
+          <p:cNvPr id="346" name="Text 344"/>
           <p:cNvSpPr/>
           <p:nvPr/>
         </p:nvSpPr>
@@ -13763,7 +13648,7 @@
       </p:sp>
       <p:sp>
         <p:nvSpPr>
-          <p:cNvPr id="352" name="Text 350"/>
+          <p:cNvPr id="347" name="Text 345"/>
           <p:cNvSpPr/>
           <p:nvPr/>
         </p:nvSpPr>
@@ -13805,7 +13690,7 @@
       </p:sp>
       <p:sp>
         <p:nvSpPr>
-          <p:cNvPr id="353" name="Text 351"/>
+          <p:cNvPr id="348" name="Text 346"/>
           <p:cNvSpPr/>
           <p:nvPr/>
         </p:nvSpPr>
@@ -13847,7 +13732,7 @@
       </p:sp>
       <p:sp>
         <p:nvSpPr>
-          <p:cNvPr id="354" name="Text 352"/>
+          <p:cNvPr id="349" name="Text 347"/>
           <p:cNvSpPr/>
           <p:nvPr/>
         </p:nvSpPr>
